--- a/manual.pptx
+++ b/manual.pptx
@@ -5,7 +5,7 @@
     <p:sldMasterId id="2147483648" r:id="rId1"/>
   </p:sldMasterIdLst>
   <p:notesMasterIdLst>
-    <p:notesMasterId r:id="rId27"/>
+    <p:notesMasterId r:id="rId30"/>
   </p:notesMasterIdLst>
   <p:sldIdLst>
     <p:sldId id="256" r:id="rId2"/>
@@ -28,11 +28,14 @@
     <p:sldId id="270" r:id="rId19"/>
     <p:sldId id="282" r:id="rId20"/>
     <p:sldId id="271" r:id="rId21"/>
-    <p:sldId id="274" r:id="rId22"/>
-    <p:sldId id="275" r:id="rId23"/>
-    <p:sldId id="276" r:id="rId24"/>
-    <p:sldId id="283" r:id="rId25"/>
-    <p:sldId id="285" r:id="rId26"/>
+    <p:sldId id="286" r:id="rId22"/>
+    <p:sldId id="287" r:id="rId23"/>
+    <p:sldId id="289" r:id="rId24"/>
+    <p:sldId id="274" r:id="rId25"/>
+    <p:sldId id="275" r:id="rId26"/>
+    <p:sldId id="276" r:id="rId27"/>
+    <p:sldId id="283" r:id="rId28"/>
+    <p:sldId id="285" r:id="rId29"/>
   </p:sldIdLst>
   <p:sldSz cx="13004800" cy="9753600"/>
   <p:notesSz cx="6858000" cy="9144000"/>
@@ -2213,7 +2216,7 @@
           </a:ln>
           <a:extLst>
             <a:ext uri="{C572A759-6A51-4108-AA02-DFA0A04FC94B}">
-              <ma14:wrappingTextBoxFlag xmlns:ma14="http://schemas.microsoft.com/office/mac/drawingml/2011/main" xmlns="" val="1"/>
+              <ma14:wrappingTextBoxFlag xmlns="" xmlns:ma14="http://schemas.microsoft.com/office/mac/drawingml/2011/main" val="1"/>
             </a:ext>
           </a:extLst>
         </p:spPr>
@@ -2252,7 +2255,7 @@
           </a:ln>
           <a:extLst>
             <a:ext uri="{C572A759-6A51-4108-AA02-DFA0A04FC94B}">
-              <ma14:wrappingTextBoxFlag xmlns:ma14="http://schemas.microsoft.com/office/mac/drawingml/2011/main" xmlns="" val="1"/>
+              <ma14:wrappingTextBoxFlag xmlns="" xmlns:ma14="http://schemas.microsoft.com/office/mac/drawingml/2011/main" val="1"/>
             </a:ext>
           </a:extLst>
         </p:spPr>
@@ -3591,7 +3594,7 @@
             <a:effectLst/>
             <a:extLst>
               <a:ext uri="{C572A759-6A51-4108-AA02-DFA0A04FC94B}">
-                <ma14:wrappingTextBoxFlag xmlns:ma14="http://schemas.microsoft.com/office/mac/drawingml/2011/main" xmlns="" val="1"/>
+                <ma14:wrappingTextBoxFlag xmlns="" xmlns:ma14="http://schemas.microsoft.com/office/mac/drawingml/2011/main" val="1"/>
               </a:ext>
             </a:extLst>
           </p:spPr>
@@ -3737,6 +3740,80 @@
           </a:extLst>
         </p:spPr>
       </p:pic>
+      <p:sp>
+        <p:nvSpPr>
+          <p:cNvPr id="2" name="TextBox 1"/>
+          <p:cNvSpPr txBox="1"/>
+          <p:nvPr/>
+        </p:nvSpPr>
+        <p:spPr>
+          <a:xfrm>
+            <a:off x="11398944" y="9269288"/>
+            <a:ext cx="1415451" cy="287258"/>
+          </a:xfrm>
+          <a:prstGeom prst="rect">
+            <a:avLst/>
+          </a:prstGeom>
+          <a:noFill/>
+          <a:ln w="12700" cap="flat">
+            <a:noFill/>
+            <a:miter lim="400000"/>
+          </a:ln>
+          <a:effectLst/>
+          <a:sp3d/>
+        </p:spPr>
+        <p:style>
+          <a:lnRef idx="0">
+            <a:scrgbClr r="0" g="0" b="0"/>
+          </a:lnRef>
+          <a:fillRef idx="0">
+            <a:scrgbClr r="0" g="0" b="0"/>
+          </a:fillRef>
+          <a:effectRef idx="0">
+            <a:scrgbClr r="0" g="0" b="0"/>
+          </a:effectRef>
+          <a:fontRef idx="none"/>
+        </p:style>
+        <p:txBody>
+          <a:bodyPr rot="0" spcFirstLastPara="1" vertOverflow="overflow" horzOverflow="overflow" vert="horz" wrap="none" lIns="50800" tIns="50800" rIns="50800" bIns="50800" numCol="1" spcCol="38100" rtlCol="0" anchor="ctr">
+            <a:spAutoFit/>
+          </a:bodyPr>
+          <a:lstStyle/>
+          <a:p>
+            <a:pPr marL="0" marR="0" indent="0" algn="ctr" defTabSz="584200" rtl="0" fontAlgn="auto" latinLnBrk="0" hangingPunct="0">
+              <a:lnSpc>
+                <a:spcPct val="100000"/>
+              </a:lnSpc>
+              <a:spcBef>
+                <a:spcPts val="0"/>
+              </a:spcBef>
+              <a:spcAft>
+                <a:spcPts val="0"/>
+              </a:spcAft>
+              <a:buClrTx/>
+              <a:buSzTx/>
+              <a:buFontTx/>
+              <a:buNone/>
+              <a:tabLst/>
+            </a:pPr>
+            <a:r>
+              <a:rPr lang="en-US" altLang="ko-KR" sz="1200" dirty="0" smtClean="0"/>
+              <a:t>Edited 2016.04.29</a:t>
+            </a:r>
+            <a:endParaRPr kumimoji="0" lang="ko-KR" altLang="en-US" sz="1200" b="0" i="0" u="none" strike="noStrike" cap="none" spc="0" normalizeH="0" baseline="0" dirty="0">
+              <a:ln>
+                <a:noFill/>
+              </a:ln>
+              <a:solidFill>
+                <a:srgbClr val="000000"/>
+              </a:solidFill>
+              <a:effectLst/>
+              <a:uFillTx/>
+              <a:sym typeface="Apple SD 산돌고딕 Neo 옅은체"/>
+            </a:endParaRPr>
+          </a:p>
+        </p:txBody>
+      </p:sp>
     </p:spTree>
   </p:cSld>
   <p:clrMapOvr>
@@ -3789,7 +3866,7 @@
           </a:ln>
           <a:extLst>
             <a:ext uri="{C572A759-6A51-4108-AA02-DFA0A04FC94B}">
-              <ma14:wrappingTextBoxFlag xmlns:ma14="http://schemas.microsoft.com/office/mac/drawingml/2011/main" xmlns="" val="1"/>
+              <ma14:wrappingTextBoxFlag xmlns="" xmlns:ma14="http://schemas.microsoft.com/office/mac/drawingml/2011/main" val="1"/>
             </a:ext>
           </a:extLst>
         </p:spPr>
@@ -3910,7 +3987,7 @@
           </a:ln>
           <a:extLst>
             <a:ext uri="{C572A759-6A51-4108-AA02-DFA0A04FC94B}">
-              <ma14:wrappingTextBoxFlag xmlns:ma14="http://schemas.microsoft.com/office/mac/drawingml/2011/main" xmlns="" val="1"/>
+              <ma14:wrappingTextBoxFlag xmlns="" xmlns:ma14="http://schemas.microsoft.com/office/mac/drawingml/2011/main" val="1"/>
             </a:ext>
           </a:extLst>
         </p:spPr>
@@ -4407,7 +4484,7 @@
           </a:prstGeom>
           <a:extLst>
             <a:ext uri="{C572A759-6A51-4108-AA02-DFA0A04FC94B}">
-              <ma14:wrappingTextBoxFlag xmlns:ma14="http://schemas.microsoft.com/office/mac/drawingml/2011/main" xmlns="" val="1"/>
+              <ma14:wrappingTextBoxFlag xmlns="" xmlns:ma14="http://schemas.microsoft.com/office/mac/drawingml/2011/main" val="1"/>
             </a:ext>
           </a:extLst>
         </p:spPr>
@@ -4526,7 +4603,7 @@
           </a:ln>
           <a:extLst>
             <a:ext uri="{C572A759-6A51-4108-AA02-DFA0A04FC94B}">
-              <ma14:wrappingTextBoxFlag xmlns:ma14="http://schemas.microsoft.com/office/mac/drawingml/2011/main" xmlns="" val="1"/>
+              <ma14:wrappingTextBoxFlag xmlns="" xmlns:ma14="http://schemas.microsoft.com/office/mac/drawingml/2011/main" val="1"/>
             </a:ext>
           </a:extLst>
         </p:spPr>
@@ -4661,7 +4738,7 @@
           </a:ln>
           <a:extLst>
             <a:ext uri="{C572A759-6A51-4108-AA02-DFA0A04FC94B}">
-              <ma14:wrappingTextBoxFlag xmlns:ma14="http://schemas.microsoft.com/office/mac/drawingml/2011/main" xmlns="" val="1"/>
+              <ma14:wrappingTextBoxFlag xmlns="" xmlns:ma14="http://schemas.microsoft.com/office/mac/drawingml/2011/main" val="1"/>
             </a:ext>
           </a:extLst>
         </p:spPr>
@@ -4824,7 +4901,7 @@
           </a:prstGeom>
           <a:extLst>
             <a:ext uri="{C572A759-6A51-4108-AA02-DFA0A04FC94B}">
-              <ma14:wrappingTextBoxFlag xmlns:ma14="http://schemas.microsoft.com/office/mac/drawingml/2011/main" xmlns="" val="1"/>
+              <ma14:wrappingTextBoxFlag xmlns="" xmlns:ma14="http://schemas.microsoft.com/office/mac/drawingml/2011/main" val="1"/>
             </a:ext>
           </a:extLst>
         </p:spPr>
@@ -4943,7 +5020,7 @@
           </a:ln>
           <a:extLst>
             <a:ext uri="{C572A759-6A51-4108-AA02-DFA0A04FC94B}">
-              <ma14:wrappingTextBoxFlag xmlns:ma14="http://schemas.microsoft.com/office/mac/drawingml/2011/main" xmlns="" val="1"/>
+              <ma14:wrappingTextBoxFlag xmlns="" xmlns:ma14="http://schemas.microsoft.com/office/mac/drawingml/2011/main" val="1"/>
             </a:ext>
           </a:extLst>
         </p:spPr>
@@ -5078,7 +5155,7 @@
           </a:ln>
           <a:extLst>
             <a:ext uri="{C572A759-6A51-4108-AA02-DFA0A04FC94B}">
-              <ma14:wrappingTextBoxFlag xmlns:ma14="http://schemas.microsoft.com/office/mac/drawingml/2011/main" xmlns="" val="1"/>
+              <ma14:wrappingTextBoxFlag xmlns="" xmlns:ma14="http://schemas.microsoft.com/office/mac/drawingml/2011/main" val="1"/>
             </a:ext>
           </a:extLst>
         </p:spPr>
@@ -5371,7 +5448,7 @@
           </a:prstGeom>
           <a:extLst>
             <a:ext uri="{C572A759-6A51-4108-AA02-DFA0A04FC94B}">
-              <ma14:wrappingTextBoxFlag xmlns:ma14="http://schemas.microsoft.com/office/mac/drawingml/2011/main" xmlns="" val="1"/>
+              <ma14:wrappingTextBoxFlag xmlns="" xmlns:ma14="http://schemas.microsoft.com/office/mac/drawingml/2011/main" val="1"/>
             </a:ext>
           </a:extLst>
         </p:spPr>
@@ -5490,7 +5567,7 @@
           </a:ln>
           <a:extLst>
             <a:ext uri="{C572A759-6A51-4108-AA02-DFA0A04FC94B}">
-              <ma14:wrappingTextBoxFlag xmlns:ma14="http://schemas.microsoft.com/office/mac/drawingml/2011/main" xmlns="" val="1"/>
+              <ma14:wrappingTextBoxFlag xmlns="" xmlns:ma14="http://schemas.microsoft.com/office/mac/drawingml/2011/main" val="1"/>
             </a:ext>
           </a:extLst>
         </p:spPr>
@@ -5611,7 +5688,7 @@
           </a:ln>
           <a:extLst>
             <a:ext uri="{C572A759-6A51-4108-AA02-DFA0A04FC94B}">
-              <ma14:wrappingTextBoxFlag xmlns:ma14="http://schemas.microsoft.com/office/mac/drawingml/2011/main" xmlns="" val="1"/>
+              <ma14:wrappingTextBoxFlag xmlns="" xmlns:ma14="http://schemas.microsoft.com/office/mac/drawingml/2011/main" val="1"/>
             </a:ext>
           </a:extLst>
         </p:spPr>
@@ -6228,7 +6305,7 @@
           </a:prstGeom>
           <a:extLst>
             <a:ext uri="{C572A759-6A51-4108-AA02-DFA0A04FC94B}">
-              <ma14:wrappingTextBoxFlag xmlns:ma14="http://schemas.microsoft.com/office/mac/drawingml/2011/main" xmlns="" val="1"/>
+              <ma14:wrappingTextBoxFlag xmlns="" xmlns:ma14="http://schemas.microsoft.com/office/mac/drawingml/2011/main" val="1"/>
             </a:ext>
           </a:extLst>
         </p:spPr>
@@ -6342,7 +6419,7 @@
           </a:ln>
           <a:extLst>
             <a:ext uri="{C572A759-6A51-4108-AA02-DFA0A04FC94B}">
-              <ma14:wrappingTextBoxFlag xmlns:ma14="http://schemas.microsoft.com/office/mac/drawingml/2011/main" xmlns="" val="1"/>
+              <ma14:wrappingTextBoxFlag xmlns="" xmlns:ma14="http://schemas.microsoft.com/office/mac/drawingml/2011/main" val="1"/>
             </a:ext>
           </a:extLst>
         </p:spPr>
@@ -6449,7 +6526,7 @@
           </a:ln>
           <a:extLst>
             <a:ext uri="{C572A759-6A51-4108-AA02-DFA0A04FC94B}">
-              <ma14:wrappingTextBoxFlag xmlns:ma14="http://schemas.microsoft.com/office/mac/drawingml/2011/main" xmlns="" val="1"/>
+              <ma14:wrappingTextBoxFlag xmlns="" xmlns:ma14="http://schemas.microsoft.com/office/mac/drawingml/2011/main" val="1"/>
             </a:ext>
           </a:extLst>
         </p:spPr>
@@ -6814,7 +6891,7 @@
           </a:prstGeom>
           <a:extLst>
             <a:ext uri="{C572A759-6A51-4108-AA02-DFA0A04FC94B}">
-              <ma14:wrappingTextBoxFlag xmlns:ma14="http://schemas.microsoft.com/office/mac/drawingml/2011/main" xmlns="" val="1"/>
+              <ma14:wrappingTextBoxFlag xmlns="" xmlns:ma14="http://schemas.microsoft.com/office/mac/drawingml/2011/main" val="1"/>
             </a:ext>
           </a:extLst>
         </p:spPr>
@@ -6928,7 +7005,7 @@
           </a:ln>
           <a:extLst>
             <a:ext uri="{C572A759-6A51-4108-AA02-DFA0A04FC94B}">
-              <ma14:wrappingTextBoxFlag xmlns:ma14="http://schemas.microsoft.com/office/mac/drawingml/2011/main" xmlns="" val="1"/>
+              <ma14:wrappingTextBoxFlag xmlns="" xmlns:ma14="http://schemas.microsoft.com/office/mac/drawingml/2011/main" val="1"/>
             </a:ext>
           </a:extLst>
         </p:spPr>
@@ -7035,7 +7112,7 @@
           </a:ln>
           <a:extLst>
             <a:ext uri="{C572A759-6A51-4108-AA02-DFA0A04FC94B}">
-              <ma14:wrappingTextBoxFlag xmlns:ma14="http://schemas.microsoft.com/office/mac/drawingml/2011/main" xmlns="" val="1"/>
+              <ma14:wrappingTextBoxFlag xmlns="" xmlns:ma14="http://schemas.microsoft.com/office/mac/drawingml/2011/main" val="1"/>
             </a:ext>
           </a:extLst>
         </p:spPr>
@@ -7843,7 +7920,7 @@
           </a:prstGeom>
           <a:extLst>
             <a:ext uri="{C572A759-6A51-4108-AA02-DFA0A04FC94B}">
-              <ma14:wrappingTextBoxFlag xmlns:ma14="http://schemas.microsoft.com/office/mac/drawingml/2011/main" xmlns="" val="1"/>
+              <ma14:wrappingTextBoxFlag xmlns="" xmlns:ma14="http://schemas.microsoft.com/office/mac/drawingml/2011/main" val="1"/>
             </a:ext>
           </a:extLst>
         </p:spPr>
@@ -7957,7 +8034,7 @@
           </a:ln>
           <a:extLst>
             <a:ext uri="{C572A759-6A51-4108-AA02-DFA0A04FC94B}">
-              <ma14:wrappingTextBoxFlag xmlns:ma14="http://schemas.microsoft.com/office/mac/drawingml/2011/main" xmlns="" val="1"/>
+              <ma14:wrappingTextBoxFlag xmlns="" xmlns:ma14="http://schemas.microsoft.com/office/mac/drawingml/2011/main" val="1"/>
             </a:ext>
           </a:extLst>
         </p:spPr>
@@ -8078,7 +8155,7 @@
           </a:ln>
           <a:extLst>
             <a:ext uri="{C572A759-6A51-4108-AA02-DFA0A04FC94B}">
-              <ma14:wrappingTextBoxFlag xmlns:ma14="http://schemas.microsoft.com/office/mac/drawingml/2011/main" xmlns="" val="1"/>
+              <ma14:wrappingTextBoxFlag xmlns="" xmlns:ma14="http://schemas.microsoft.com/office/mac/drawingml/2011/main" val="1"/>
             </a:ext>
           </a:extLst>
         </p:spPr>
@@ -8715,7 +8792,7 @@
           </a:prstGeom>
           <a:extLst>
             <a:ext uri="{C572A759-6A51-4108-AA02-DFA0A04FC94B}">
-              <ma14:wrappingTextBoxFlag xmlns:ma14="http://schemas.microsoft.com/office/mac/drawingml/2011/main" xmlns="" val="1"/>
+              <ma14:wrappingTextBoxFlag xmlns="" xmlns:ma14="http://schemas.microsoft.com/office/mac/drawingml/2011/main" val="1"/>
             </a:ext>
           </a:extLst>
         </p:spPr>
@@ -8858,7 +8935,7 @@
           </a:ln>
           <a:extLst>
             <a:ext uri="{C572A759-6A51-4108-AA02-DFA0A04FC94B}">
-              <ma14:wrappingTextBoxFlag xmlns:ma14="http://schemas.microsoft.com/office/mac/drawingml/2011/main" xmlns="" val="1"/>
+              <ma14:wrappingTextBoxFlag xmlns="" xmlns:ma14="http://schemas.microsoft.com/office/mac/drawingml/2011/main" val="1"/>
             </a:ext>
           </a:extLst>
         </p:spPr>
@@ -8965,7 +9042,7 @@
           </a:ln>
           <a:extLst>
             <a:ext uri="{C572A759-6A51-4108-AA02-DFA0A04FC94B}">
-              <ma14:wrappingTextBoxFlag xmlns:ma14="http://schemas.microsoft.com/office/mac/drawingml/2011/main" xmlns="" val="1"/>
+              <ma14:wrappingTextBoxFlag xmlns="" xmlns:ma14="http://schemas.microsoft.com/office/mac/drawingml/2011/main" val="1"/>
             </a:ext>
           </a:extLst>
         </p:spPr>
@@ -9448,7 +9525,7 @@
           </a:prstGeom>
           <a:extLst>
             <a:ext uri="{C572A759-6A51-4108-AA02-DFA0A04FC94B}">
-              <ma14:wrappingTextBoxFlag xmlns:ma14="http://schemas.microsoft.com/office/mac/drawingml/2011/main" xmlns="" val="1"/>
+              <ma14:wrappingTextBoxFlag xmlns="" xmlns:ma14="http://schemas.microsoft.com/office/mac/drawingml/2011/main" val="1"/>
             </a:ext>
           </a:extLst>
         </p:spPr>
@@ -9562,7 +9639,7 @@
           </a:ln>
           <a:extLst>
             <a:ext uri="{C572A759-6A51-4108-AA02-DFA0A04FC94B}">
-              <ma14:wrappingTextBoxFlag xmlns:ma14="http://schemas.microsoft.com/office/mac/drawingml/2011/main" xmlns="" val="1"/>
+              <ma14:wrappingTextBoxFlag xmlns="" xmlns:ma14="http://schemas.microsoft.com/office/mac/drawingml/2011/main" val="1"/>
             </a:ext>
           </a:extLst>
         </p:spPr>
@@ -9676,7 +9753,7 @@
           </a:ln>
           <a:extLst>
             <a:ext uri="{C572A759-6A51-4108-AA02-DFA0A04FC94B}">
-              <ma14:wrappingTextBoxFlag xmlns:ma14="http://schemas.microsoft.com/office/mac/drawingml/2011/main" xmlns="" val="1"/>
+              <ma14:wrappingTextBoxFlag xmlns="" xmlns:ma14="http://schemas.microsoft.com/office/mac/drawingml/2011/main" val="1"/>
             </a:ext>
           </a:extLst>
         </p:spPr>
@@ -9786,7 +9863,7 @@
           </a:prstGeom>
           <a:extLst>
             <a:ext uri="{C572A759-6A51-4108-AA02-DFA0A04FC94B}">
-              <ma14:wrappingTextBoxFlag xmlns:ma14="http://schemas.microsoft.com/office/mac/drawingml/2011/main" xmlns="" val="1"/>
+              <ma14:wrappingTextBoxFlag xmlns="" xmlns:ma14="http://schemas.microsoft.com/office/mac/drawingml/2011/main" val="1"/>
             </a:ext>
           </a:extLst>
         </p:spPr>
@@ -9954,7 +10031,7 @@
           </a:ln>
           <a:extLst>
             <a:ext uri="{C572A759-6A51-4108-AA02-DFA0A04FC94B}">
-              <ma14:wrappingTextBoxFlag xmlns:ma14="http://schemas.microsoft.com/office/mac/drawingml/2011/main" xmlns="" val="1"/>
+              <ma14:wrappingTextBoxFlag xmlns="" xmlns:ma14="http://schemas.microsoft.com/office/mac/drawingml/2011/main" val="1"/>
             </a:ext>
           </a:extLst>
         </p:spPr>
@@ -10068,7 +10145,7 @@
           </a:ln>
           <a:extLst>
             <a:ext uri="{C572A759-6A51-4108-AA02-DFA0A04FC94B}">
-              <ma14:wrappingTextBoxFlag xmlns:ma14="http://schemas.microsoft.com/office/mac/drawingml/2011/main" xmlns="" val="1"/>
+              <ma14:wrappingTextBoxFlag xmlns="" xmlns:ma14="http://schemas.microsoft.com/office/mac/drawingml/2011/main" val="1"/>
             </a:ext>
           </a:extLst>
         </p:spPr>
@@ -10273,7 +10350,7 @@
           </a:prstGeom>
           <a:extLst>
             <a:ext uri="{C572A759-6A51-4108-AA02-DFA0A04FC94B}">
-              <ma14:wrappingTextBoxFlag xmlns:ma14="http://schemas.microsoft.com/office/mac/drawingml/2011/main" xmlns="" val="1"/>
+              <ma14:wrappingTextBoxFlag xmlns="" xmlns:ma14="http://schemas.microsoft.com/office/mac/drawingml/2011/main" val="1"/>
             </a:ext>
           </a:extLst>
         </p:spPr>
@@ -10424,7 +10501,7 @@
           </a:ln>
           <a:extLst>
             <a:ext uri="{C572A759-6A51-4108-AA02-DFA0A04FC94B}">
-              <ma14:wrappingTextBoxFlag xmlns:ma14="http://schemas.microsoft.com/office/mac/drawingml/2011/main" xmlns="" val="1"/>
+              <ma14:wrappingTextBoxFlag xmlns="" xmlns:ma14="http://schemas.microsoft.com/office/mac/drawingml/2011/main" val="1"/>
             </a:ext>
           </a:extLst>
         </p:spPr>
@@ -10460,7 +10537,7 @@
         </p:nvSpPr>
         <p:spPr>
           <a:xfrm>
-            <a:off x="953179" y="2556863"/>
+            <a:off x="1264521" y="2553301"/>
             <a:ext cx="3005631" cy="348813"/>
           </a:xfrm>
           <a:prstGeom prst="rect">
@@ -10716,7 +10793,7 @@
         </p:nvSpPr>
         <p:spPr>
           <a:xfrm>
-            <a:off x="953179" y="3298540"/>
+            <a:off x="953179" y="3291417"/>
             <a:ext cx="2141612" cy="379591"/>
           </a:xfrm>
           <a:prstGeom prst="rect">
@@ -10820,7 +10897,7 @@
         </p:nvSpPr>
         <p:spPr>
           <a:xfrm>
-            <a:off x="953179" y="4086384"/>
+            <a:off x="953179" y="4060311"/>
             <a:ext cx="2404504" cy="379591"/>
           </a:xfrm>
           <a:prstGeom prst="rect">
@@ -10924,7 +11001,7 @@
         </p:nvSpPr>
         <p:spPr>
           <a:xfrm>
-            <a:off x="953179" y="4874228"/>
+            <a:off x="953179" y="4829205"/>
             <a:ext cx="2404504" cy="379591"/>
           </a:xfrm>
           <a:prstGeom prst="rect">
@@ -11028,7 +11105,7 @@
         </p:nvSpPr>
         <p:spPr>
           <a:xfrm>
-            <a:off x="953179" y="5662072"/>
+            <a:off x="953179" y="5598099"/>
             <a:ext cx="2827697" cy="379591"/>
           </a:xfrm>
           <a:prstGeom prst="rect">
@@ -11132,7 +11209,7 @@
         </p:nvSpPr>
         <p:spPr>
           <a:xfrm>
-            <a:off x="953179" y="6449916"/>
+            <a:off x="953179" y="6366993"/>
             <a:ext cx="2141612" cy="379591"/>
           </a:xfrm>
           <a:prstGeom prst="rect">
@@ -11236,7 +11313,7 @@
         </p:nvSpPr>
         <p:spPr>
           <a:xfrm>
-            <a:off x="953179" y="7237760"/>
+            <a:off x="953179" y="7135887"/>
             <a:ext cx="1878719" cy="379591"/>
           </a:xfrm>
           <a:prstGeom prst="rect">
@@ -11340,7 +11417,7 @@
         </p:nvSpPr>
         <p:spPr>
           <a:xfrm>
-            <a:off x="953179" y="8025601"/>
+            <a:off x="953179" y="7904781"/>
             <a:ext cx="1878719" cy="379591"/>
           </a:xfrm>
           <a:prstGeom prst="rect">
@@ -11458,7 +11535,7 @@
         </p:nvSpPr>
         <p:spPr>
           <a:xfrm>
-            <a:off x="7654528" y="1730760"/>
+            <a:off x="953179" y="8673672"/>
             <a:ext cx="2564805" cy="379591"/>
           </a:xfrm>
           <a:prstGeom prst="rect">
@@ -11553,7 +11630,7 @@
         </p:nvSpPr>
         <p:spPr>
           <a:xfrm>
-            <a:off x="7654528" y="2562496"/>
+            <a:off x="7455637" y="1781521"/>
             <a:ext cx="2218556" cy="379591"/>
           </a:xfrm>
           <a:prstGeom prst="rect">
@@ -11657,7 +11734,7 @@
         </p:nvSpPr>
         <p:spPr>
           <a:xfrm>
-            <a:off x="7654528" y="3394232"/>
+            <a:off x="7455637" y="2491927"/>
             <a:ext cx="2519921" cy="379591"/>
           </a:xfrm>
           <a:prstGeom prst="rect">
@@ -11793,7 +11870,7 @@
         </p:nvSpPr>
         <p:spPr>
           <a:xfrm>
-            <a:off x="7654528" y="4225968"/>
+            <a:off x="7455637" y="3202333"/>
             <a:ext cx="2006960" cy="379591"/>
           </a:xfrm>
           <a:prstGeom prst="rect">
@@ -11897,7 +11974,7 @@
         </p:nvSpPr>
         <p:spPr>
           <a:xfrm>
-            <a:off x="7654528" y="5057704"/>
+            <a:off x="7455637" y="3912739"/>
             <a:ext cx="3327834" cy="379591"/>
           </a:xfrm>
           <a:prstGeom prst="rect">
@@ -12001,7 +12078,159 @@
         </p:nvSpPr>
         <p:spPr>
           <a:xfrm>
-            <a:off x="7654528" y="5889440"/>
+            <a:off x="7455637" y="5333551"/>
+            <a:ext cx="2587248" cy="379591"/>
+          </a:xfrm>
+          <a:prstGeom prst="rect">
+            <a:avLst/>
+          </a:prstGeom>
+          <a:noFill/>
+          <a:ln w="12700" cap="flat">
+            <a:noFill/>
+            <a:miter lim="400000"/>
+          </a:ln>
+          <a:effectLst/>
+          <a:sp3d/>
+        </p:spPr>
+        <p:style>
+          <a:lnRef idx="0">
+            <a:scrgbClr r="0" g="0" b="0"/>
+          </a:lnRef>
+          <a:fillRef idx="0">
+            <a:scrgbClr r="0" g="0" b="0"/>
+          </a:fillRef>
+          <a:effectRef idx="0">
+            <a:scrgbClr r="0" g="0" b="0"/>
+          </a:effectRef>
+          <a:fontRef idx="none"/>
+        </p:style>
+        <p:txBody>
+          <a:bodyPr rot="0" spcFirstLastPara="1" vertOverflow="overflow" horzOverflow="overflow" vert="horz" wrap="none" lIns="50800" tIns="50800" rIns="50800" bIns="50800" numCol="1" spcCol="38100" rtlCol="0" anchor="ctr">
+            <a:spAutoFit/>
+          </a:bodyPr>
+          <a:lstStyle/>
+          <a:p>
+            <a:pPr marL="0" marR="0" indent="0" algn="ctr" defTabSz="584200" rtl="0" fontAlgn="auto" latinLnBrk="0" hangingPunct="0">
+              <a:lnSpc>
+                <a:spcPct val="100000"/>
+              </a:lnSpc>
+              <a:spcBef>
+                <a:spcPts val="0"/>
+              </a:spcBef>
+              <a:spcAft>
+                <a:spcPts val="0"/>
+              </a:spcAft>
+              <a:buClrTx/>
+              <a:buSzTx/>
+              <a:buFontTx/>
+              <a:buNone/>
+              <a:tabLst/>
+            </a:pPr>
+            <a:r>
+              <a:rPr kumimoji="0" lang="en-US" altLang="ko-KR" sz="1800" b="0" i="0" u="none" strike="noStrike" cap="none" spc="0" normalizeH="0" baseline="0" dirty="0" smtClean="0">
+                <a:ln>
+                  <a:noFill/>
+                </a:ln>
+                <a:solidFill>
+                  <a:srgbClr val="000000"/>
+                </a:solidFill>
+                <a:effectLst/>
+                <a:uFillTx/>
+                <a:latin typeface="Noto Sans CJK KR Regular" pitchFamily="34" charset="-127"/>
+                <a:ea typeface="Noto Sans CJK KR Regular" pitchFamily="34" charset="-127"/>
+                <a:sym typeface="Apple SD 산돌고딕 Neo 옅은체"/>
+              </a:rPr>
+              <a:t>15. </a:t>
+            </a:r>
+            <a:r>
+              <a:rPr kumimoji="0" lang="ko-KR" altLang="en-US" sz="1800" b="0" i="0" u="none" strike="noStrike" cap="none" spc="0" normalizeH="0" baseline="0" dirty="0" smtClean="0">
+                <a:ln>
+                  <a:noFill/>
+                </a:ln>
+                <a:solidFill>
+                  <a:srgbClr val="000000"/>
+                </a:solidFill>
+                <a:effectLst/>
+                <a:uFillTx/>
+                <a:latin typeface="Noto Sans CJK KR Regular" pitchFamily="34" charset="-127"/>
+                <a:ea typeface="Noto Sans CJK KR Regular" pitchFamily="34" charset="-127"/>
+                <a:sym typeface="Apple SD 산돌고딕 Neo 옅은체"/>
+              </a:rPr>
+              <a:t>정산관리하기 </a:t>
+            </a:r>
+            <a:r>
+              <a:rPr kumimoji="0" lang="en-US" altLang="ko-KR" sz="1800" b="0" i="0" u="none" strike="noStrike" cap="none" spc="0" normalizeH="0" baseline="0" dirty="0" smtClean="0">
+                <a:ln>
+                  <a:noFill/>
+                </a:ln>
+                <a:solidFill>
+                  <a:srgbClr val="000000"/>
+                </a:solidFill>
+                <a:effectLst/>
+                <a:uFillTx/>
+                <a:latin typeface="Noto Sans CJK KR Regular" pitchFamily="34" charset="-127"/>
+                <a:ea typeface="Noto Sans CJK KR Regular" pitchFamily="34" charset="-127"/>
+                <a:sym typeface="Apple SD 산돌고딕 Neo 옅은체"/>
+              </a:rPr>
+              <a:t>(</a:t>
+            </a:r>
+            <a:r>
+              <a:rPr kumimoji="0" lang="ko-KR" altLang="en-US" sz="1800" b="0" i="0" u="none" strike="noStrike" cap="none" spc="0" normalizeH="0" baseline="0" dirty="0" smtClean="0">
+                <a:ln>
+                  <a:noFill/>
+                </a:ln>
+                <a:solidFill>
+                  <a:srgbClr val="000000"/>
+                </a:solidFill>
+                <a:effectLst/>
+                <a:uFillTx/>
+                <a:latin typeface="Noto Sans CJK KR Regular" pitchFamily="34" charset="-127"/>
+                <a:ea typeface="Noto Sans CJK KR Regular" pitchFamily="34" charset="-127"/>
+                <a:sym typeface="Apple SD 산돌고딕 Neo 옅은체"/>
+              </a:rPr>
+              <a:t>업체별</a:t>
+            </a:r>
+            <a:r>
+              <a:rPr kumimoji="0" lang="en-US" altLang="ko-KR" sz="1800" b="0" i="0" u="none" strike="noStrike" cap="none" spc="0" normalizeH="0" baseline="0" dirty="0" smtClean="0">
+                <a:ln>
+                  <a:noFill/>
+                </a:ln>
+                <a:solidFill>
+                  <a:srgbClr val="000000"/>
+                </a:solidFill>
+                <a:effectLst/>
+                <a:uFillTx/>
+                <a:latin typeface="Noto Sans CJK KR Regular" pitchFamily="34" charset="-127"/>
+                <a:ea typeface="Noto Sans CJK KR Regular" pitchFamily="34" charset="-127"/>
+                <a:sym typeface="Apple SD 산돌고딕 Neo 옅은체"/>
+              </a:rPr>
+              <a:t>)</a:t>
+            </a:r>
+            <a:endParaRPr kumimoji="0" lang="ko-KR" altLang="en-US" sz="1800" b="0" i="0" u="none" strike="noStrike" cap="none" spc="0" normalizeH="0" baseline="0" dirty="0">
+              <a:ln>
+                <a:noFill/>
+              </a:ln>
+              <a:solidFill>
+                <a:srgbClr val="000000"/>
+              </a:solidFill>
+              <a:effectLst/>
+              <a:uFillTx/>
+              <a:latin typeface="Noto Sans CJK KR Regular" pitchFamily="34" charset="-127"/>
+              <a:ea typeface="Noto Sans CJK KR Regular" pitchFamily="34" charset="-127"/>
+              <a:sym typeface="Apple SD 산돌고딕 Neo 옅은체"/>
+            </a:endParaRPr>
+          </a:p>
+        </p:txBody>
+      </p:sp>
+      <p:sp>
+        <p:nvSpPr>
+          <p:cNvPr id="19" name="TextBox 18"/>
+          <p:cNvSpPr txBox="1"/>
+          <p:nvPr/>
+        </p:nvSpPr>
+        <p:spPr>
+          <a:xfrm>
+            <a:off x="7455637" y="6754363"/>
             <a:ext cx="2058256" cy="379591"/>
           </a:xfrm>
           <a:prstGeom prst="rect">
@@ -12063,7 +12292,7 @@
                 <a:ea typeface="Noto Sans CJK KR Regular" pitchFamily="34" charset="-127"/>
                 <a:sym typeface="Apple SD 산돌고딕 Neo 옅은체"/>
               </a:rPr>
-              <a:t>14. </a:t>
+              <a:t>16. </a:t>
             </a:r>
             <a:r>
               <a:rPr kumimoji="0" lang="ko-KR" altLang="en-US" sz="1800" b="0" i="0" u="none" strike="noStrike" cap="none" spc="0" normalizeH="0" baseline="0" dirty="0" smtClean="0">
@@ -12099,14 +12328,14 @@
       </p:sp>
       <p:sp>
         <p:nvSpPr>
-          <p:cNvPr id="19" name="TextBox 18"/>
+          <p:cNvPr id="20" name="TextBox 19"/>
           <p:cNvSpPr txBox="1"/>
           <p:nvPr/>
         </p:nvSpPr>
         <p:spPr>
           <a:xfrm>
-            <a:off x="7654528" y="6721176"/>
-            <a:ext cx="2519921" cy="379591"/>
+            <a:off x="7455637" y="8175175"/>
+            <a:ext cx="1835439" cy="379591"/>
           </a:xfrm>
           <a:prstGeom prst="rect">
             <a:avLst/>
@@ -12167,28 +12396,55 @@
                 <a:ea typeface="Noto Sans CJK KR Regular" pitchFamily="34" charset="-127"/>
                 <a:sym typeface="Apple SD 산돌고딕 Neo 옅은체"/>
               </a:rPr>
-              <a:t>15. </a:t>
-            </a:r>
-            <a:r>
-              <a:rPr lang="ko-KR" altLang="en-US" sz="1800" dirty="0" smtClean="0">
-                <a:latin typeface="Noto Sans CJK KR Regular" pitchFamily="34" charset="-127"/>
-                <a:ea typeface="Noto Sans CJK KR Regular" pitchFamily="34" charset="-127"/>
-              </a:rPr>
-              <a:t>게시판 생성</a:t>
-            </a:r>
-            <a:r>
-              <a:rPr lang="en-US" altLang="ko-KR" sz="1800" dirty="0" smtClean="0">
-                <a:latin typeface="Noto Sans CJK KR Regular" pitchFamily="34" charset="-127"/>
-                <a:ea typeface="Noto Sans CJK KR Regular" pitchFamily="34" charset="-127"/>
-              </a:rPr>
-              <a:t>/</a:t>
-            </a:r>
-            <a:r>
-              <a:rPr lang="ko-KR" altLang="en-US" sz="1800" dirty="0" smtClean="0">
-                <a:latin typeface="Noto Sans CJK KR Regular" pitchFamily="34" charset="-127"/>
-                <a:ea typeface="Noto Sans CJK KR Regular" pitchFamily="34" charset="-127"/>
-              </a:rPr>
-              <a:t>관리하기</a:t>
+              <a:t>18. </a:t>
+            </a:r>
+            <a:r>
+              <a:rPr kumimoji="0" lang="en-US" altLang="ko-KR" sz="1800" b="0" i="0" u="none" strike="noStrike" cap="none" spc="0" normalizeH="0" baseline="0" dirty="0" smtClean="0">
+                <a:ln>
+                  <a:noFill/>
+                </a:ln>
+                <a:solidFill>
+                  <a:srgbClr val="000000"/>
+                </a:solidFill>
+                <a:effectLst/>
+                <a:uFillTx/>
+                <a:latin typeface="Noto Sans CJK KR Regular" pitchFamily="34" charset="-127"/>
+                <a:ea typeface="Noto Sans CJK KR Regular" pitchFamily="34" charset="-127"/>
+                <a:sym typeface="Apple SD 산돌고딕 Neo 옅은체"/>
+              </a:rPr>
+              <a:t>SMS</a:t>
+            </a:r>
+            <a:r>
+              <a:rPr kumimoji="0" lang="en-US" altLang="ko-KR" sz="1800" b="0" i="0" u="none" strike="noStrike" cap="none" spc="0" normalizeH="0" dirty="0" smtClean="0">
+                <a:ln>
+                  <a:noFill/>
+                </a:ln>
+                <a:solidFill>
+                  <a:srgbClr val="000000"/>
+                </a:solidFill>
+                <a:effectLst/>
+                <a:uFillTx/>
+                <a:latin typeface="Noto Sans CJK KR Regular" pitchFamily="34" charset="-127"/>
+                <a:ea typeface="Noto Sans CJK KR Regular" pitchFamily="34" charset="-127"/>
+                <a:sym typeface="Apple SD 산돌고딕 Neo 옅은체"/>
+              </a:rPr>
+              <a:t> </a:t>
+            </a:r>
+            <a:r>
+              <a:rPr kumimoji="0" lang="ko-KR" altLang="en-US" sz="1800" b="0" i="0" u="none" strike="noStrike" cap="none" spc="0" normalizeH="0" dirty="0" smtClean="0">
+                <a:ln>
+                  <a:noFill/>
+                </a:ln>
+                <a:solidFill>
+                  <a:srgbClr val="000000"/>
+                </a:solidFill>
+                <a:effectLst/>
+                <a:uFillTx/>
+                <a:latin typeface="Noto Sans CJK KR Regular" pitchFamily="34" charset="-127"/>
+                <a:ea typeface="Noto Sans CJK KR Regular" pitchFamily="34" charset="-127"/>
+                <a:sym typeface="Apple SD 산돌고딕 Neo 옅은체"/>
+              </a:rPr>
+              <a:t>설정하기</a:t>
             </a:r>
             <a:endParaRPr kumimoji="0" lang="ko-KR" altLang="en-US" sz="1800" b="0" i="0" u="none" strike="noStrike" cap="none" spc="0" normalizeH="0" baseline="0" dirty="0">
               <a:ln>
@@ -12208,14 +12464,14 @@
       </p:sp>
       <p:sp>
         <p:nvSpPr>
-          <p:cNvPr id="20" name="TextBox 19"/>
+          <p:cNvPr id="21" name="TextBox 20"/>
           <p:cNvSpPr txBox="1"/>
           <p:nvPr/>
         </p:nvSpPr>
         <p:spPr>
           <a:xfrm>
-            <a:off x="7654528" y="7552912"/>
-            <a:ext cx="1835438" cy="379591"/>
+            <a:off x="7455637" y="8885582"/>
+            <a:ext cx="2481450" cy="379591"/>
           </a:xfrm>
           <a:prstGeom prst="rect">
             <a:avLst/>
@@ -12276,10 +12532,10 @@
                 <a:ea typeface="Noto Sans CJK KR Regular" pitchFamily="34" charset="-127"/>
                 <a:sym typeface="Apple SD 산돌고딕 Neo 옅은체"/>
               </a:rPr>
-              <a:t>16. SMS</a:t>
-            </a:r>
-            <a:r>
-              <a:rPr kumimoji="0" lang="en-US" altLang="ko-KR" sz="1800" b="0" i="0" u="none" strike="noStrike" cap="none" spc="0" normalizeH="0" dirty="0" smtClean="0">
+              <a:t>19. </a:t>
+            </a:r>
+            <a:r>
+              <a:rPr kumimoji="0" lang="ko-KR" altLang="en-US" sz="1800" b="0" i="0" u="none" strike="noStrike" cap="none" spc="0" normalizeH="0" baseline="0" dirty="0" err="1" smtClean="0">
                 <a:ln>
                   <a:noFill/>
                 </a:ln>
@@ -12292,10 +12548,10 @@
                 <a:ea typeface="Noto Sans CJK KR Regular" pitchFamily="34" charset="-127"/>
                 <a:sym typeface="Apple SD 산돌고딕 Neo 옅은체"/>
               </a:rPr>
-              <a:t> </a:t>
-            </a:r>
-            <a:r>
-              <a:rPr kumimoji="0" lang="ko-KR" altLang="en-US" sz="1800" b="0" i="0" u="none" strike="noStrike" cap="none" spc="0" normalizeH="0" dirty="0" smtClean="0">
+              <a:t>어드민</a:t>
+            </a:r>
+            <a:r>
+              <a:rPr kumimoji="0" lang="ko-KR" altLang="en-US" sz="1800" b="0" i="0" u="none" strike="noStrike" cap="none" spc="0" normalizeH="0" baseline="0" dirty="0" smtClean="0">
                 <a:ln>
                   <a:noFill/>
                 </a:ln>
@@ -12308,7 +12564,7 @@
                 <a:ea typeface="Noto Sans CJK KR Regular" pitchFamily="34" charset="-127"/>
                 <a:sym typeface="Apple SD 산돌고딕 Neo 옅은체"/>
               </a:rPr>
-              <a:t>설정하기</a:t>
+              <a:t> 정보 설정하기</a:t>
             </a:r>
             <a:endParaRPr kumimoji="0" lang="ko-KR" altLang="en-US" sz="1800" b="0" i="0" u="none" strike="noStrike" cap="none" spc="0" normalizeH="0" baseline="0" dirty="0">
               <a:ln>
@@ -12326,16 +12582,54 @@
           </a:p>
         </p:txBody>
       </p:sp>
+      <p:cxnSp>
+        <p:nvCxnSpPr>
+          <p:cNvPr id="26" name="직선 연결선 25"/>
+          <p:cNvCxnSpPr/>
+          <p:nvPr/>
+        </p:nvCxnSpPr>
+        <p:spPr>
+          <a:xfrm>
+            <a:off x="6358384" y="1582816"/>
+            <a:ext cx="0" cy="7850038"/>
+          </a:xfrm>
+          <a:prstGeom prst="line">
+            <a:avLst/>
+          </a:prstGeom>
+          <a:noFill/>
+          <a:ln w="25400" cap="flat">
+            <a:solidFill>
+              <a:srgbClr val="000000"/>
+            </a:solidFill>
+            <a:prstDash val="sysDot"/>
+            <a:miter lim="400000"/>
+          </a:ln>
+          <a:effectLst/>
+          <a:sp3d/>
+        </p:spPr>
+        <p:style>
+          <a:lnRef idx="0">
+            <a:scrgbClr r="0" g="0" b="0"/>
+          </a:lnRef>
+          <a:fillRef idx="0">
+            <a:scrgbClr r="0" g="0" b="0"/>
+          </a:fillRef>
+          <a:effectRef idx="0">
+            <a:scrgbClr r="0" g="0" b="0"/>
+          </a:effectRef>
+          <a:fontRef idx="none"/>
+        </p:style>
+      </p:cxnSp>
       <p:sp>
         <p:nvSpPr>
-          <p:cNvPr id="21" name="TextBox 20"/>
+          <p:cNvPr id="23" name="TextBox 22"/>
           <p:cNvSpPr txBox="1"/>
           <p:nvPr/>
         </p:nvSpPr>
         <p:spPr>
           <a:xfrm>
-            <a:off x="7654528" y="8384647"/>
-            <a:ext cx="2481449" cy="379591"/>
+            <a:off x="7455637" y="4623145"/>
+            <a:ext cx="2218556" cy="379591"/>
           </a:xfrm>
           <a:prstGeom prst="rect">
             <a:avLst/>
@@ -12396,23 +12690,7 @@
                 <a:ea typeface="Noto Sans CJK KR Regular" pitchFamily="34" charset="-127"/>
                 <a:sym typeface="Apple SD 산돌고딕 Neo 옅은체"/>
               </a:rPr>
-              <a:t>17. </a:t>
-            </a:r>
-            <a:r>
-              <a:rPr kumimoji="0" lang="ko-KR" altLang="en-US" sz="1800" b="0" i="0" u="none" strike="noStrike" cap="none" spc="0" normalizeH="0" baseline="0" dirty="0" err="1" smtClean="0">
-                <a:ln>
-                  <a:noFill/>
-                </a:ln>
-                <a:solidFill>
-                  <a:srgbClr val="000000"/>
-                </a:solidFill>
-                <a:effectLst/>
-                <a:uFillTx/>
-                <a:latin typeface="Noto Sans CJK KR Regular" pitchFamily="34" charset="-127"/>
-                <a:ea typeface="Noto Sans CJK KR Regular" pitchFamily="34" charset="-127"/>
-                <a:sym typeface="Apple SD 산돌고딕 Neo 옅은체"/>
-              </a:rPr>
-              <a:t>어드민</a:t>
+              <a:t>14. </a:t>
             </a:r>
             <a:r>
               <a:rPr kumimoji="0" lang="ko-KR" altLang="en-US" sz="1800" b="0" i="0" u="none" strike="noStrike" cap="none" spc="0" normalizeH="0" baseline="0" dirty="0" smtClean="0">
@@ -12428,7 +12706,7 @@
                 <a:ea typeface="Noto Sans CJK KR Regular" pitchFamily="34" charset="-127"/>
                 <a:sym typeface="Apple SD 산돌고딕 Neo 옅은체"/>
               </a:rPr>
-              <a:t> 정보 설정하기</a:t>
+              <a:t>배송정보 설정하기</a:t>
             </a:r>
             <a:endParaRPr kumimoji="0" lang="ko-KR" altLang="en-US" sz="1800" b="0" i="0" u="none" strike="noStrike" cap="none" spc="0" normalizeH="0" baseline="0" dirty="0">
               <a:ln>
@@ -12446,26 +12724,23 @@
           </a:p>
         </p:txBody>
       </p:sp>
-      <p:cxnSp>
-        <p:nvCxnSpPr>
-          <p:cNvPr id="26" name="직선 연결선 25"/>
-          <p:cNvCxnSpPr/>
+      <p:sp>
+        <p:nvSpPr>
+          <p:cNvPr id="25" name="TextBox 24"/>
+          <p:cNvSpPr txBox="1"/>
           <p:nvPr/>
-        </p:nvCxnSpPr>
+        </p:nvSpPr>
         <p:spPr>
           <a:xfrm>
-            <a:off x="6358384" y="1582816"/>
-            <a:ext cx="0" cy="7177298"/>
+            <a:off x="7873862" y="6043957"/>
+            <a:ext cx="2660986" cy="379591"/>
           </a:xfrm>
-          <a:prstGeom prst="line">
+          <a:prstGeom prst="rect">
             <a:avLst/>
           </a:prstGeom>
           <a:noFill/>
-          <a:ln w="25400" cap="flat">
-            <a:solidFill>
-              <a:srgbClr val="000000"/>
-            </a:solidFill>
-            <a:prstDash val="sysDot"/>
+          <a:ln w="12700" cap="flat">
+            <a:noFill/>
             <a:miter lim="400000"/>
           </a:ln>
           <a:effectLst/>
@@ -12483,7 +12758,249 @@
           </a:effectRef>
           <a:fontRef idx="none"/>
         </p:style>
-      </p:cxnSp>
+        <p:txBody>
+          <a:bodyPr rot="0" spcFirstLastPara="1" vertOverflow="overflow" horzOverflow="overflow" vert="horz" wrap="none" lIns="50800" tIns="50800" rIns="50800" bIns="50800" numCol="1" spcCol="38100" rtlCol="0" anchor="ctr">
+            <a:spAutoFit/>
+          </a:bodyPr>
+          <a:lstStyle/>
+          <a:p>
+            <a:pPr marL="0" marR="0" indent="0" algn="ctr" defTabSz="584200" rtl="0" fontAlgn="auto" latinLnBrk="0" hangingPunct="0">
+              <a:lnSpc>
+                <a:spcPct val="100000"/>
+              </a:lnSpc>
+              <a:spcBef>
+                <a:spcPts val="0"/>
+              </a:spcBef>
+              <a:spcAft>
+                <a:spcPts val="0"/>
+              </a:spcAft>
+              <a:buClrTx/>
+              <a:buSzTx/>
+              <a:buFontTx/>
+              <a:buNone/>
+              <a:tabLst/>
+            </a:pPr>
+            <a:r>
+              <a:rPr kumimoji="0" lang="en-US" altLang="ko-KR" sz="1800" b="0" i="0" u="none" strike="noStrike" cap="none" spc="0" normalizeH="0" baseline="0" dirty="0" smtClean="0">
+                <a:ln>
+                  <a:noFill/>
+                </a:ln>
+                <a:solidFill>
+                  <a:srgbClr val="000000"/>
+                </a:solidFill>
+                <a:effectLst/>
+                <a:uFillTx/>
+                <a:latin typeface="Noto Sans CJK KR Regular" pitchFamily="34" charset="-127"/>
+                <a:ea typeface="Noto Sans CJK KR Regular" pitchFamily="34" charset="-127"/>
+                <a:sym typeface="Apple SD 산돌고딕 Neo 옅은체"/>
+              </a:rPr>
+              <a:t>15-1. </a:t>
+            </a:r>
+            <a:r>
+              <a:rPr kumimoji="0" lang="ko-KR" altLang="en-US" sz="1600" b="0" i="0" u="none" strike="noStrike" cap="none" spc="0" normalizeH="0" baseline="0" dirty="0" smtClean="0">
+                <a:ln>
+                  <a:noFill/>
+                </a:ln>
+                <a:solidFill>
+                  <a:srgbClr val="000000"/>
+                </a:solidFill>
+                <a:effectLst/>
+                <a:uFillTx/>
+                <a:latin typeface="Noto Sans CJK KR Regular" pitchFamily="34" charset="-127"/>
+                <a:ea typeface="Noto Sans CJK KR Regular" pitchFamily="34" charset="-127"/>
+                <a:sym typeface="Apple SD 산돌고딕 Neo 옅은체"/>
+              </a:rPr>
+              <a:t>정산관리하기</a:t>
+            </a:r>
+            <a:r>
+              <a:rPr kumimoji="0" lang="ko-KR" altLang="en-US" sz="1800" b="0" i="0" u="none" strike="noStrike" cap="none" spc="0" normalizeH="0" baseline="0" dirty="0" smtClean="0">
+                <a:ln>
+                  <a:noFill/>
+                </a:ln>
+                <a:solidFill>
+                  <a:srgbClr val="000000"/>
+                </a:solidFill>
+                <a:effectLst/>
+                <a:uFillTx/>
+                <a:latin typeface="Noto Sans CJK KR Regular" pitchFamily="34" charset="-127"/>
+                <a:ea typeface="Noto Sans CJK KR Regular" pitchFamily="34" charset="-127"/>
+                <a:sym typeface="Apple SD 산돌고딕 Neo 옅은체"/>
+              </a:rPr>
+              <a:t> </a:t>
+            </a:r>
+            <a:r>
+              <a:rPr kumimoji="0" lang="en-US" altLang="ko-KR" sz="1800" b="0" i="0" u="none" strike="noStrike" cap="none" spc="0" normalizeH="0" baseline="0" dirty="0" smtClean="0">
+                <a:ln>
+                  <a:noFill/>
+                </a:ln>
+                <a:solidFill>
+                  <a:srgbClr val="000000"/>
+                </a:solidFill>
+                <a:effectLst/>
+                <a:uFillTx/>
+                <a:latin typeface="Noto Sans CJK KR Regular" pitchFamily="34" charset="-127"/>
+                <a:ea typeface="Noto Sans CJK KR Regular" pitchFamily="34" charset="-127"/>
+                <a:sym typeface="Apple SD 산돌고딕 Neo 옅은체"/>
+              </a:rPr>
+              <a:t>(</a:t>
+            </a:r>
+            <a:r>
+              <a:rPr kumimoji="0" lang="ko-KR" altLang="en-US" sz="1800" b="0" i="0" u="none" strike="noStrike" cap="none" spc="0" normalizeH="0" baseline="0" dirty="0" smtClean="0">
+                <a:ln>
+                  <a:noFill/>
+                </a:ln>
+                <a:solidFill>
+                  <a:srgbClr val="000000"/>
+                </a:solidFill>
+                <a:effectLst/>
+                <a:uFillTx/>
+                <a:latin typeface="Noto Sans CJK KR Regular" pitchFamily="34" charset="-127"/>
+                <a:ea typeface="Noto Sans CJK KR Regular" pitchFamily="34" charset="-127"/>
+                <a:sym typeface="Apple SD 산돌고딕 Neo 옅은체"/>
+              </a:rPr>
+              <a:t>기간별</a:t>
+            </a:r>
+            <a:r>
+              <a:rPr kumimoji="0" lang="en-US" altLang="ko-KR" sz="1800" b="0" i="0" u="none" strike="noStrike" cap="none" spc="0" normalizeH="0" baseline="0" dirty="0" smtClean="0">
+                <a:ln>
+                  <a:noFill/>
+                </a:ln>
+                <a:solidFill>
+                  <a:srgbClr val="000000"/>
+                </a:solidFill>
+                <a:effectLst/>
+                <a:uFillTx/>
+                <a:latin typeface="Noto Sans CJK KR Regular" pitchFamily="34" charset="-127"/>
+                <a:ea typeface="Noto Sans CJK KR Regular" pitchFamily="34" charset="-127"/>
+                <a:sym typeface="Apple SD 산돌고딕 Neo 옅은체"/>
+              </a:rPr>
+              <a:t>)</a:t>
+            </a:r>
+            <a:endParaRPr kumimoji="0" lang="ko-KR" altLang="en-US" sz="1800" b="0" i="0" u="none" strike="noStrike" cap="none" spc="0" normalizeH="0" baseline="0" dirty="0">
+              <a:ln>
+                <a:noFill/>
+              </a:ln>
+              <a:solidFill>
+                <a:srgbClr val="000000"/>
+              </a:solidFill>
+              <a:effectLst/>
+              <a:uFillTx/>
+              <a:latin typeface="Noto Sans CJK KR Regular" pitchFamily="34" charset="-127"/>
+              <a:ea typeface="Noto Sans CJK KR Regular" pitchFamily="34" charset="-127"/>
+              <a:sym typeface="Apple SD 산돌고딕 Neo 옅은체"/>
+            </a:endParaRPr>
+          </a:p>
+        </p:txBody>
+      </p:sp>
+      <p:sp>
+        <p:nvSpPr>
+          <p:cNvPr id="27" name="TextBox 26"/>
+          <p:cNvSpPr txBox="1"/>
+          <p:nvPr/>
+        </p:nvSpPr>
+        <p:spPr>
+          <a:xfrm>
+            <a:off x="7455637" y="7464769"/>
+            <a:ext cx="2519922" cy="379591"/>
+          </a:xfrm>
+          <a:prstGeom prst="rect">
+            <a:avLst/>
+          </a:prstGeom>
+          <a:noFill/>
+          <a:ln w="12700" cap="flat">
+            <a:noFill/>
+            <a:miter lim="400000"/>
+          </a:ln>
+          <a:effectLst/>
+          <a:sp3d/>
+        </p:spPr>
+        <p:style>
+          <a:lnRef idx="0">
+            <a:scrgbClr r="0" g="0" b="0"/>
+          </a:lnRef>
+          <a:fillRef idx="0">
+            <a:scrgbClr r="0" g="0" b="0"/>
+          </a:fillRef>
+          <a:effectRef idx="0">
+            <a:scrgbClr r="0" g="0" b="0"/>
+          </a:effectRef>
+          <a:fontRef idx="none"/>
+        </p:style>
+        <p:txBody>
+          <a:bodyPr rot="0" spcFirstLastPara="1" vertOverflow="overflow" horzOverflow="overflow" vert="horz" wrap="none" lIns="50800" tIns="50800" rIns="50800" bIns="50800" numCol="1" spcCol="38100" rtlCol="0" anchor="ctr">
+            <a:spAutoFit/>
+          </a:bodyPr>
+          <a:lstStyle/>
+          <a:p>
+            <a:pPr marL="0" marR="0" indent="0" algn="ctr" defTabSz="584200" rtl="0" fontAlgn="auto" latinLnBrk="0" hangingPunct="0">
+              <a:lnSpc>
+                <a:spcPct val="100000"/>
+              </a:lnSpc>
+              <a:spcBef>
+                <a:spcPts val="0"/>
+              </a:spcBef>
+              <a:spcAft>
+                <a:spcPts val="0"/>
+              </a:spcAft>
+              <a:buClrTx/>
+              <a:buSzTx/>
+              <a:buFontTx/>
+              <a:buNone/>
+              <a:tabLst/>
+            </a:pPr>
+            <a:r>
+              <a:rPr kumimoji="0" lang="en-US" altLang="ko-KR" sz="1800" b="0" i="0" u="none" strike="noStrike" cap="none" spc="0" normalizeH="0" baseline="0" dirty="0" smtClean="0">
+                <a:ln>
+                  <a:noFill/>
+                </a:ln>
+                <a:solidFill>
+                  <a:srgbClr val="000000"/>
+                </a:solidFill>
+                <a:effectLst/>
+                <a:uFillTx/>
+                <a:latin typeface="Noto Sans CJK KR Regular" pitchFamily="34" charset="-127"/>
+                <a:ea typeface="Noto Sans CJK KR Regular" pitchFamily="34" charset="-127"/>
+                <a:sym typeface="Apple SD 산돌고딕 Neo 옅은체"/>
+              </a:rPr>
+              <a:t>17. </a:t>
+            </a:r>
+            <a:r>
+              <a:rPr lang="ko-KR" altLang="en-US" sz="1800" dirty="0" smtClean="0">
+                <a:latin typeface="Noto Sans CJK KR Regular" pitchFamily="34" charset="-127"/>
+                <a:ea typeface="Noto Sans CJK KR Regular" pitchFamily="34" charset="-127"/>
+              </a:rPr>
+              <a:t>게시판 생성</a:t>
+            </a:r>
+            <a:r>
+              <a:rPr lang="en-US" altLang="ko-KR" sz="1800" dirty="0" smtClean="0">
+                <a:latin typeface="Noto Sans CJK KR Regular" pitchFamily="34" charset="-127"/>
+                <a:ea typeface="Noto Sans CJK KR Regular" pitchFamily="34" charset="-127"/>
+              </a:rPr>
+              <a:t>/</a:t>
+            </a:r>
+            <a:r>
+              <a:rPr lang="ko-KR" altLang="en-US" sz="1800" dirty="0" smtClean="0">
+                <a:latin typeface="Noto Sans CJK KR Regular" pitchFamily="34" charset="-127"/>
+                <a:ea typeface="Noto Sans CJK KR Regular" pitchFamily="34" charset="-127"/>
+              </a:rPr>
+              <a:t>관리하기</a:t>
+            </a:r>
+            <a:endParaRPr kumimoji="0" lang="ko-KR" altLang="en-US" sz="1800" b="0" i="0" u="none" strike="noStrike" cap="none" spc="0" normalizeH="0" baseline="0" dirty="0">
+              <a:ln>
+                <a:noFill/>
+              </a:ln>
+              <a:solidFill>
+                <a:srgbClr val="000000"/>
+              </a:solidFill>
+              <a:effectLst/>
+              <a:uFillTx/>
+              <a:latin typeface="Noto Sans CJK KR Regular" pitchFamily="34" charset="-127"/>
+              <a:ea typeface="Noto Sans CJK KR Regular" pitchFamily="34" charset="-127"/>
+              <a:sym typeface="Apple SD 산돌고딕 Neo 옅은체"/>
+            </a:endParaRPr>
+          </a:p>
+        </p:txBody>
+      </p:sp>
     </p:spTree>
     <p:extLst>
       <p:ext uri="{BB962C8B-B14F-4D97-AF65-F5344CB8AC3E}">
@@ -12541,7 +13058,7 @@
           </a:ln>
           <a:extLst>
             <a:ext uri="{C572A759-6A51-4108-AA02-DFA0A04FC94B}">
-              <ma14:wrappingTextBoxFlag xmlns:ma14="http://schemas.microsoft.com/office/mac/drawingml/2011/main" xmlns="" val="1"/>
+              <ma14:wrappingTextBoxFlag xmlns="" xmlns:ma14="http://schemas.microsoft.com/office/mac/drawingml/2011/main" val="1"/>
             </a:ext>
           </a:extLst>
         </p:spPr>
@@ -12683,7 +13200,7 @@
           </a:ln>
           <a:extLst>
             <a:ext uri="{C572A759-6A51-4108-AA02-DFA0A04FC94B}">
-              <ma14:wrappingTextBoxFlag xmlns:ma14="http://schemas.microsoft.com/office/mac/drawingml/2011/main" xmlns="" val="1"/>
+              <ma14:wrappingTextBoxFlag xmlns="" xmlns:ma14="http://schemas.microsoft.com/office/mac/drawingml/2011/main" val="1"/>
             </a:ext>
           </a:extLst>
         </p:spPr>
@@ -13208,7 +13725,7 @@
           </a:prstGeom>
           <a:extLst>
             <a:ext uri="{C572A759-6A51-4108-AA02-DFA0A04FC94B}">
-              <ma14:wrappingTextBoxFlag xmlns:ma14="http://schemas.microsoft.com/office/mac/drawingml/2011/main" xmlns="" val="1"/>
+              <ma14:wrappingTextBoxFlag xmlns="" xmlns:ma14="http://schemas.microsoft.com/office/mac/drawingml/2011/main" val="1"/>
             </a:ext>
           </a:extLst>
         </p:spPr>
@@ -13305,6 +13822,1191 @@
       </p:grpSpPr>
       <p:sp>
         <p:nvSpPr>
+          <p:cNvPr id="245" name="Shape 245"/>
+          <p:cNvSpPr/>
+          <p:nvPr/>
+        </p:nvSpPr>
+        <p:spPr>
+          <a:xfrm>
+            <a:off x="483755" y="250300"/>
+            <a:ext cx="3164328" cy="502702"/>
+          </a:xfrm>
+          <a:prstGeom prst="rect">
+            <a:avLst/>
+          </a:prstGeom>
+          <a:ln w="12700">
+            <a:miter lim="400000"/>
+          </a:ln>
+          <a:extLst>
+            <a:ext uri="{C572A759-6A51-4108-AA02-DFA0A04FC94B}">
+              <ma14:wrappingTextBoxFlag xmlns="" xmlns:ma14="http://schemas.microsoft.com/office/mac/drawingml/2011/main" val="1"/>
+            </a:ext>
+          </a:extLst>
+        </p:spPr>
+        <p:txBody>
+          <a:bodyPr wrap="none" lIns="50800" tIns="50800" rIns="50800" bIns="50800" anchor="ctr">
+            <a:spAutoFit/>
+          </a:bodyPr>
+          <a:lstStyle>
+            <a:lvl1pPr algn="l">
+              <a:defRPr sz="2600"/>
+            </a:lvl1pPr>
+          </a:lstStyle>
+          <a:p>
+            <a:r>
+              <a:rPr dirty="0" smtClean="0">
+                <a:latin typeface="Noto Sans CJK KR Regular" pitchFamily="34" charset="-127"/>
+                <a:ea typeface="Noto Sans CJK KR Regular" pitchFamily="34" charset="-127"/>
+              </a:rPr>
+              <a:t>1</a:t>
+            </a:r>
+            <a:r>
+              <a:rPr lang="en-US" dirty="0" smtClean="0">
+                <a:latin typeface="Noto Sans CJK KR Regular" pitchFamily="34" charset="-127"/>
+                <a:ea typeface="Noto Sans CJK KR Regular" pitchFamily="34" charset="-127"/>
+              </a:rPr>
+              <a:t>4</a:t>
+            </a:r>
+            <a:r>
+              <a:rPr dirty="0" smtClean="0">
+                <a:latin typeface="Noto Sans CJK KR Regular" pitchFamily="34" charset="-127"/>
+                <a:ea typeface="Noto Sans CJK KR Regular" pitchFamily="34" charset="-127"/>
+              </a:rPr>
+              <a:t>. </a:t>
+            </a:r>
+            <a:r>
+              <a:rPr lang="ko-KR" altLang="en-US" dirty="0" smtClean="0">
+                <a:latin typeface="Noto Sans CJK KR Regular" pitchFamily="34" charset="-127"/>
+                <a:ea typeface="Noto Sans CJK KR Regular" pitchFamily="34" charset="-127"/>
+              </a:rPr>
+              <a:t>배송정보 설정하기</a:t>
+            </a:r>
+            <a:endParaRPr dirty="0">
+              <a:latin typeface="Noto Sans CJK KR Regular" pitchFamily="34" charset="-127"/>
+              <a:ea typeface="Noto Sans CJK KR Regular" pitchFamily="34" charset="-127"/>
+            </a:endParaRPr>
+          </a:p>
+        </p:txBody>
+      </p:sp>
+      <p:sp>
+        <p:nvSpPr>
+          <p:cNvPr id="246" name="Shape 246"/>
+          <p:cNvSpPr/>
+          <p:nvPr/>
+        </p:nvSpPr>
+        <p:spPr>
+          <a:xfrm>
+            <a:off x="447774" y="977900"/>
+            <a:ext cx="12109253" cy="0"/>
+          </a:xfrm>
+          <a:prstGeom prst="line">
+            <a:avLst/>
+          </a:prstGeom>
+          <a:ln w="25400">
+            <a:solidFill>
+              <a:srgbClr val="000000"/>
+            </a:solidFill>
+            <a:miter lim="400000"/>
+          </a:ln>
+        </p:spPr>
+        <p:txBody>
+          <a:bodyPr lIns="50800" tIns="50800" rIns="50800" bIns="50800" anchor="ctr"/>
+          <a:lstStyle/>
+          <a:p>
+            <a:pPr>
+              <a:defRPr sz="2400"/>
+            </a:pPr>
+            <a:endParaRPr/>
+          </a:p>
+        </p:txBody>
+      </p:sp>
+      <p:sp>
+        <p:nvSpPr>
+          <p:cNvPr id="247" name="Shape 247"/>
+          <p:cNvSpPr/>
+          <p:nvPr/>
+        </p:nvSpPr>
+        <p:spPr>
+          <a:xfrm>
+            <a:off x="473613" y="7096644"/>
+            <a:ext cx="7752122" cy="656590"/>
+          </a:xfrm>
+          <a:prstGeom prst="rect">
+            <a:avLst/>
+          </a:prstGeom>
+          <a:ln w="12700">
+            <a:miter lim="400000"/>
+          </a:ln>
+          <a:extLst>
+            <a:ext uri="{C572A759-6A51-4108-AA02-DFA0A04FC94B}">
+              <ma14:wrappingTextBoxFlag xmlns="" xmlns:ma14="http://schemas.microsoft.com/office/mac/drawingml/2011/main" val="1"/>
+            </a:ext>
+          </a:extLst>
+        </p:spPr>
+        <p:txBody>
+          <a:bodyPr wrap="none" lIns="50800" tIns="50800" rIns="50800" bIns="50800" anchor="ctr">
+            <a:spAutoFit/>
+          </a:bodyPr>
+          <a:lstStyle/>
+          <a:p>
+            <a:pPr algn="l">
+              <a:defRPr sz="1800"/>
+            </a:pPr>
+            <a:r>
+              <a:rPr lang="ko-KR" altLang="en-US" dirty="0" smtClean="0">
+                <a:latin typeface="Noto Sans CJK KR Regular" pitchFamily="34" charset="-127"/>
+                <a:ea typeface="Noto Sans CJK KR Regular" pitchFamily="34" charset="-127"/>
+              </a:rPr>
+              <a:t>① </a:t>
+            </a:r>
+            <a:r>
+              <a:rPr lang="ko-KR" altLang="en-US" dirty="0" smtClean="0">
+                <a:latin typeface="Noto Sans CJK KR Regular" pitchFamily="34" charset="-127"/>
+                <a:ea typeface="Noto Sans CJK KR Regular" pitchFamily="34" charset="-127"/>
+              </a:rPr>
+              <a:t>환경설정 </a:t>
+            </a:r>
+            <a:r>
+              <a:rPr lang="en-US" altLang="ko-KR" dirty="0" smtClean="0">
+                <a:latin typeface="Noto Sans CJK KR Regular" pitchFamily="34" charset="-127"/>
+                <a:ea typeface="Noto Sans CJK KR Regular" pitchFamily="34" charset="-127"/>
+              </a:rPr>
+              <a:t>&gt; </a:t>
+            </a:r>
+            <a:r>
+              <a:rPr lang="ko-KR" altLang="en-US" dirty="0" smtClean="0">
+                <a:latin typeface="Noto Sans CJK KR Regular" pitchFamily="34" charset="-127"/>
+                <a:ea typeface="Noto Sans CJK KR Regular" pitchFamily="34" charset="-127"/>
+              </a:rPr>
+              <a:t>배송정보 설정에서 각종 배송 및 환불 정책 등을 수정할 수 있습니다</a:t>
+            </a:r>
+            <a:r>
+              <a:rPr lang="en-US" altLang="ko-KR" dirty="0" smtClean="0">
+                <a:latin typeface="Noto Sans CJK KR Regular" pitchFamily="34" charset="-127"/>
+                <a:ea typeface="Noto Sans CJK KR Regular" pitchFamily="34" charset="-127"/>
+              </a:rPr>
+              <a:t>.</a:t>
+            </a:r>
+            <a:endParaRPr lang="en-US" dirty="0">
+              <a:latin typeface="Noto Sans CJK KR Regular" pitchFamily="34" charset="-127"/>
+              <a:ea typeface="Noto Sans CJK KR Regular" pitchFamily="34" charset="-127"/>
+            </a:endParaRPr>
+          </a:p>
+          <a:p>
+            <a:pPr algn="l">
+              <a:defRPr sz="1800"/>
+            </a:pPr>
+            <a:r>
+              <a:rPr lang="ko-KR" altLang="en-US" dirty="0" smtClean="0">
+                <a:latin typeface="Noto Sans CJK KR Regular" pitchFamily="34" charset="-127"/>
+                <a:ea typeface="Noto Sans CJK KR Regular" pitchFamily="34" charset="-127"/>
+              </a:rPr>
+              <a:t>② </a:t>
+            </a:r>
+            <a:r>
+              <a:rPr lang="ko-KR" altLang="en-US" dirty="0" smtClean="0">
+                <a:latin typeface="Noto Sans CJK KR Regular" pitchFamily="34" charset="-127"/>
+                <a:ea typeface="Noto Sans CJK KR Regular" pitchFamily="34" charset="-127"/>
+              </a:rPr>
+              <a:t>예제 문구를 참고하셔서 작성하시거나 내부 정책을 반영해 작성하시면 됩니다</a:t>
+            </a:r>
+            <a:r>
+              <a:rPr lang="en-US" altLang="ko-KR" dirty="0" smtClean="0">
+                <a:latin typeface="Noto Sans CJK KR Regular" pitchFamily="34" charset="-127"/>
+                <a:ea typeface="Noto Sans CJK KR Regular" pitchFamily="34" charset="-127"/>
+              </a:rPr>
+              <a:t>.</a:t>
+            </a:r>
+            <a:endParaRPr lang="en-US" dirty="0" smtClean="0">
+              <a:latin typeface="Noto Sans CJK KR Regular" pitchFamily="34" charset="-127"/>
+              <a:ea typeface="Noto Sans CJK KR Regular" pitchFamily="34" charset="-127"/>
+            </a:endParaRPr>
+          </a:p>
+        </p:txBody>
+      </p:sp>
+      <p:sp>
+        <p:nvSpPr>
+          <p:cNvPr id="248" name="Shape 248"/>
+          <p:cNvSpPr>
+            <a:spLocks noGrp="1"/>
+          </p:cNvSpPr>
+          <p:nvPr>
+            <p:ph type="sldNum" sz="quarter" idx="4294967295"/>
+          </p:nvPr>
+        </p:nvSpPr>
+        <p:spPr>
+          <a:xfrm>
+            <a:off x="6337172" y="9251950"/>
+            <a:ext cx="317755" cy="368300"/>
+          </a:xfrm>
+          <a:prstGeom prst="rect">
+            <a:avLst/>
+          </a:prstGeom>
+          <a:extLst>
+            <a:ext uri="{C572A759-6A51-4108-AA02-DFA0A04FC94B}">
+              <ma14:wrappingTextBoxFlag xmlns="" xmlns:ma14="http://schemas.microsoft.com/office/mac/drawingml/2011/main" val="1"/>
+            </a:ext>
+          </a:extLst>
+        </p:spPr>
+        <p:txBody>
+          <a:bodyPr/>
+          <a:lstStyle/>
+          <a:p>
+            <a:fld id="{86CB4B4D-7CA3-9044-876B-883B54F8677D}" type="slidenum">
+              <a:t>21</a:t>
+            </a:fld>
+            <a:endParaRPr/>
+          </a:p>
+        </p:txBody>
+      </p:sp>
+      <p:pic>
+        <p:nvPicPr>
+          <p:cNvPr id="1026" name="Picture 2"/>
+          <p:cNvPicPr>
+            <a:picLocks noChangeAspect="1" noChangeArrowheads="1"/>
+          </p:cNvPicPr>
+          <p:nvPr/>
+        </p:nvPicPr>
+        <p:blipFill>
+          <a:blip r:embed="rId2">
+            <a:extLst>
+              <a:ext uri="{28A0092B-C50C-407E-A947-70E740481C1C}">
+                <a14:useLocalDpi xmlns:a14="http://schemas.microsoft.com/office/drawing/2010/main" val="0"/>
+              </a:ext>
+            </a:extLst>
+          </a:blip>
+          <a:srcRect/>
+          <a:stretch>
+            <a:fillRect/>
+          </a:stretch>
+        </p:blipFill>
+        <p:spPr bwMode="auto">
+          <a:xfrm>
+            <a:off x="2721980" y="1348408"/>
+            <a:ext cx="7560840" cy="5119073"/>
+          </a:xfrm>
+          <a:prstGeom prst="rect">
+            <a:avLst/>
+          </a:prstGeom>
+          <a:noFill/>
+          <a:ln>
+            <a:noFill/>
+          </a:ln>
+          <a:extLst>
+            <a:ext uri="{909E8E84-426E-40DD-AFC4-6F175D3DCCD1}">
+              <a14:hiddenFill xmlns:a14="http://schemas.microsoft.com/office/drawing/2010/main">
+                <a:solidFill>
+                  <a:schemeClr val="accent1"/>
+                </a:solidFill>
+              </a14:hiddenFill>
+            </a:ext>
+            <a:ext uri="{91240B29-F687-4F45-9708-019B960494DF}">
+              <a14:hiddenLine xmlns:a14="http://schemas.microsoft.com/office/drawing/2010/main" w="9525">
+                <a:solidFill>
+                  <a:schemeClr val="tx1"/>
+                </a:solidFill>
+                <a:miter lim="800000"/>
+                <a:headEnd/>
+                <a:tailEnd/>
+              </a14:hiddenLine>
+            </a:ext>
+          </a:extLst>
+        </p:spPr>
+      </p:pic>
+    </p:spTree>
+    <p:extLst>
+      <p:ext uri="{BB962C8B-B14F-4D97-AF65-F5344CB8AC3E}">
+        <p14:creationId xmlns:p14="http://schemas.microsoft.com/office/powerpoint/2010/main" val="215618738"/>
+      </p:ext>
+    </p:extLst>
+  </p:cSld>
+  <p:clrMapOvr>
+    <a:masterClrMapping/>
+  </p:clrMapOvr>
+  <p:transition spd="slow"/>
+</p:sld>
+</file>
+
+<file path=ppt/slides/slide22.xml><?xml version="1.0" encoding="utf-8"?>
+<p:sld xmlns:a="http://schemas.openxmlformats.org/drawingml/2006/main" xmlns:r="http://schemas.openxmlformats.org/officeDocument/2006/relationships" xmlns:p="http://schemas.openxmlformats.org/presentationml/2006/main">
+  <p:cSld>
+    <p:spTree>
+      <p:nvGrpSpPr>
+        <p:cNvPr id="1" name=""/>
+        <p:cNvGrpSpPr/>
+        <p:nvPr/>
+      </p:nvGrpSpPr>
+      <p:grpSpPr>
+        <a:xfrm>
+          <a:off x="0" y="0"/>
+          <a:ext cx="0" cy="0"/>
+          <a:chOff x="0" y="0"/>
+          <a:chExt cx="0" cy="0"/>
+        </a:xfrm>
+      </p:grpSpPr>
+      <p:sp>
+        <p:nvSpPr>
+          <p:cNvPr id="245" name="Shape 245"/>
+          <p:cNvSpPr/>
+          <p:nvPr/>
+        </p:nvSpPr>
+        <p:spPr>
+          <a:xfrm>
+            <a:off x="483755" y="250300"/>
+            <a:ext cx="3770263" cy="502702"/>
+          </a:xfrm>
+          <a:prstGeom prst="rect">
+            <a:avLst/>
+          </a:prstGeom>
+          <a:ln w="12700">
+            <a:miter lim="400000"/>
+          </a:ln>
+          <a:extLst>
+            <a:ext uri="{C572A759-6A51-4108-AA02-DFA0A04FC94B}">
+              <ma14:wrappingTextBoxFlag xmlns="" xmlns:ma14="http://schemas.microsoft.com/office/mac/drawingml/2011/main" val="1"/>
+            </a:ext>
+          </a:extLst>
+        </p:spPr>
+        <p:txBody>
+          <a:bodyPr wrap="none" lIns="50800" tIns="50800" rIns="50800" bIns="50800" anchor="ctr">
+            <a:spAutoFit/>
+          </a:bodyPr>
+          <a:lstStyle>
+            <a:lvl1pPr algn="l">
+              <a:defRPr sz="2600"/>
+            </a:lvl1pPr>
+          </a:lstStyle>
+          <a:p>
+            <a:r>
+              <a:rPr dirty="0" smtClean="0">
+                <a:latin typeface="Noto Sans CJK KR Regular" pitchFamily="34" charset="-127"/>
+                <a:ea typeface="Noto Sans CJK KR Regular" pitchFamily="34" charset="-127"/>
+              </a:rPr>
+              <a:t>1</a:t>
+            </a:r>
+            <a:r>
+              <a:rPr lang="en-US" dirty="0" smtClean="0">
+                <a:latin typeface="Noto Sans CJK KR Regular" pitchFamily="34" charset="-127"/>
+                <a:ea typeface="Noto Sans CJK KR Regular" pitchFamily="34" charset="-127"/>
+              </a:rPr>
+              <a:t>5</a:t>
+            </a:r>
+            <a:r>
+              <a:rPr dirty="0" smtClean="0">
+                <a:latin typeface="Noto Sans CJK KR Regular" pitchFamily="34" charset="-127"/>
+                <a:ea typeface="Noto Sans CJK KR Regular" pitchFamily="34" charset="-127"/>
+              </a:rPr>
+              <a:t>. </a:t>
+            </a:r>
+            <a:r>
+              <a:rPr lang="ko-KR" altLang="en-US" dirty="0" smtClean="0">
+                <a:latin typeface="Noto Sans CJK KR Regular" pitchFamily="34" charset="-127"/>
+                <a:ea typeface="Noto Sans CJK KR Regular" pitchFamily="34" charset="-127"/>
+              </a:rPr>
+              <a:t>정산 관리하기 </a:t>
+            </a:r>
+            <a:r>
+              <a:rPr lang="en-US" altLang="ko-KR" dirty="0" smtClean="0">
+                <a:latin typeface="Noto Sans CJK KR Regular" pitchFamily="34" charset="-127"/>
+                <a:ea typeface="Noto Sans CJK KR Regular" pitchFamily="34" charset="-127"/>
+              </a:rPr>
+              <a:t>(</a:t>
+            </a:r>
+            <a:r>
+              <a:rPr lang="ko-KR" altLang="en-US" dirty="0" smtClean="0">
+                <a:latin typeface="Noto Sans CJK KR Regular" pitchFamily="34" charset="-127"/>
+                <a:ea typeface="Noto Sans CJK KR Regular" pitchFamily="34" charset="-127"/>
+              </a:rPr>
+              <a:t>업체별</a:t>
+            </a:r>
+            <a:r>
+              <a:rPr lang="en-US" altLang="ko-KR" dirty="0">
+                <a:latin typeface="Noto Sans CJK KR Regular" pitchFamily="34" charset="-127"/>
+                <a:ea typeface="Noto Sans CJK KR Regular" pitchFamily="34" charset="-127"/>
+              </a:rPr>
+              <a:t>)</a:t>
+            </a:r>
+            <a:endParaRPr dirty="0">
+              <a:latin typeface="Noto Sans CJK KR Regular" pitchFamily="34" charset="-127"/>
+              <a:ea typeface="Noto Sans CJK KR Regular" pitchFamily="34" charset="-127"/>
+            </a:endParaRPr>
+          </a:p>
+        </p:txBody>
+      </p:sp>
+      <p:sp>
+        <p:nvSpPr>
+          <p:cNvPr id="246" name="Shape 246"/>
+          <p:cNvSpPr/>
+          <p:nvPr/>
+        </p:nvSpPr>
+        <p:spPr>
+          <a:xfrm>
+            <a:off x="447774" y="977900"/>
+            <a:ext cx="12109253" cy="0"/>
+          </a:xfrm>
+          <a:prstGeom prst="line">
+            <a:avLst/>
+          </a:prstGeom>
+          <a:ln w="25400">
+            <a:solidFill>
+              <a:srgbClr val="000000"/>
+            </a:solidFill>
+            <a:miter lim="400000"/>
+          </a:ln>
+        </p:spPr>
+        <p:txBody>
+          <a:bodyPr lIns="50800" tIns="50800" rIns="50800" bIns="50800" anchor="ctr"/>
+          <a:lstStyle/>
+          <a:p>
+            <a:pPr>
+              <a:defRPr sz="2400"/>
+            </a:pPr>
+            <a:endParaRPr/>
+          </a:p>
+        </p:txBody>
+      </p:sp>
+      <p:sp>
+        <p:nvSpPr>
+          <p:cNvPr id="247" name="Shape 247"/>
+          <p:cNvSpPr/>
+          <p:nvPr/>
+        </p:nvSpPr>
+        <p:spPr>
+          <a:xfrm>
+            <a:off x="616173" y="8194685"/>
+            <a:ext cx="6681316" cy="933589"/>
+          </a:xfrm>
+          <a:prstGeom prst="rect">
+            <a:avLst/>
+          </a:prstGeom>
+          <a:ln w="12700">
+            <a:miter lim="400000"/>
+          </a:ln>
+          <a:extLst>
+            <a:ext uri="{C572A759-6A51-4108-AA02-DFA0A04FC94B}">
+              <ma14:wrappingTextBoxFlag xmlns="" xmlns:ma14="http://schemas.microsoft.com/office/mac/drawingml/2011/main" val="1"/>
+            </a:ext>
+          </a:extLst>
+        </p:spPr>
+        <p:txBody>
+          <a:bodyPr wrap="none" lIns="50800" tIns="50800" rIns="50800" bIns="50800" anchor="ctr">
+            <a:spAutoFit/>
+          </a:bodyPr>
+          <a:lstStyle/>
+          <a:p>
+            <a:pPr algn="l">
+              <a:defRPr sz="1800"/>
+            </a:pPr>
+            <a:r>
+              <a:rPr lang="ko-KR" altLang="en-US" dirty="0" smtClean="0">
+                <a:latin typeface="Noto Sans CJK KR Regular" pitchFamily="34" charset="-127"/>
+                <a:ea typeface="Noto Sans CJK KR Regular" pitchFamily="34" charset="-127"/>
+              </a:rPr>
+              <a:t>① </a:t>
+            </a:r>
+            <a:r>
+              <a:rPr lang="ko-KR" altLang="en-US" dirty="0" smtClean="0">
+                <a:latin typeface="Noto Sans CJK KR Regular" pitchFamily="34" charset="-127"/>
+                <a:ea typeface="Noto Sans CJK KR Regular" pitchFamily="34" charset="-127"/>
+              </a:rPr>
+              <a:t>업체별 정산관리에서 각 </a:t>
+            </a:r>
+            <a:r>
+              <a:rPr lang="ko-KR" altLang="en-US" dirty="0" smtClean="0">
+                <a:latin typeface="Noto Sans CJK KR Regular" pitchFamily="34" charset="-127"/>
+                <a:ea typeface="Noto Sans CJK KR Regular" pitchFamily="34" charset="-127"/>
+              </a:rPr>
+              <a:t>업체별 정산을 확인할 수 있습니다</a:t>
+            </a:r>
+            <a:r>
+              <a:rPr lang="en-US" altLang="ko-KR" dirty="0" smtClean="0">
+                <a:latin typeface="Noto Sans CJK KR Regular" pitchFamily="34" charset="-127"/>
+                <a:ea typeface="Noto Sans CJK KR Regular" pitchFamily="34" charset="-127"/>
+              </a:rPr>
+              <a:t>.</a:t>
+            </a:r>
+            <a:endParaRPr lang="en-US" altLang="ko-KR" dirty="0" smtClean="0">
+              <a:latin typeface="Noto Sans CJK KR Regular" pitchFamily="34" charset="-127"/>
+              <a:ea typeface="Noto Sans CJK KR Regular" pitchFamily="34" charset="-127"/>
+            </a:endParaRPr>
+          </a:p>
+          <a:p>
+            <a:pPr algn="l">
+              <a:defRPr sz="1800"/>
+            </a:pPr>
+            <a:r>
+              <a:rPr lang="ko-KR" altLang="en-US" dirty="0" smtClean="0">
+                <a:latin typeface="Noto Sans CJK KR Regular" pitchFamily="34" charset="-127"/>
+                <a:ea typeface="Noto Sans CJK KR Regular" pitchFamily="34" charset="-127"/>
+              </a:rPr>
+              <a:t>② 확인을 원하는 아이디를 클릭하면 </a:t>
+            </a:r>
+            <a:r>
+              <a:rPr lang="ko-KR" altLang="en-US" dirty="0" err="1" smtClean="0">
+                <a:latin typeface="Noto Sans CJK KR Regular" pitchFamily="34" charset="-127"/>
+                <a:ea typeface="Noto Sans CJK KR Regular" pitchFamily="34" charset="-127"/>
+              </a:rPr>
+              <a:t>배송완료된</a:t>
+            </a:r>
+            <a:r>
+              <a:rPr lang="ko-KR" altLang="en-US" dirty="0" smtClean="0">
+                <a:latin typeface="Noto Sans CJK KR Regular" pitchFamily="34" charset="-127"/>
+                <a:ea typeface="Noto Sans CJK KR Regular" pitchFamily="34" charset="-127"/>
+              </a:rPr>
+              <a:t> </a:t>
+            </a:r>
+            <a:r>
+              <a:rPr lang="ko-KR" altLang="en-US" dirty="0" err="1" smtClean="0">
+                <a:latin typeface="Noto Sans CJK KR Regular" pitchFamily="34" charset="-127"/>
+                <a:ea typeface="Noto Sans CJK KR Regular" pitchFamily="34" charset="-127"/>
+              </a:rPr>
+              <a:t>주문건들이</a:t>
+            </a:r>
+            <a:r>
+              <a:rPr lang="ko-KR" altLang="en-US" dirty="0" smtClean="0">
+                <a:latin typeface="Noto Sans CJK KR Regular" pitchFamily="34" charset="-127"/>
+                <a:ea typeface="Noto Sans CJK KR Regular" pitchFamily="34" charset="-127"/>
+              </a:rPr>
+              <a:t> 나옵니다</a:t>
+            </a:r>
+            <a:r>
+              <a:rPr lang="en-US" altLang="ko-KR" dirty="0" smtClean="0">
+                <a:latin typeface="Noto Sans CJK KR Regular" pitchFamily="34" charset="-127"/>
+                <a:ea typeface="Noto Sans CJK KR Regular" pitchFamily="34" charset="-127"/>
+              </a:rPr>
+              <a:t>.</a:t>
+            </a:r>
+          </a:p>
+          <a:p>
+            <a:pPr algn="l">
+              <a:defRPr sz="1800"/>
+            </a:pPr>
+            <a:r>
+              <a:rPr lang="ko-KR" altLang="en-US" dirty="0" smtClean="0">
+                <a:latin typeface="Noto Sans CJK KR Regular" pitchFamily="34" charset="-127"/>
+                <a:ea typeface="Noto Sans CJK KR Regular" pitchFamily="34" charset="-127"/>
+              </a:rPr>
+              <a:t>③ 날짜로 원하는 기간을 조회하고 금액 등을 확인합니다</a:t>
+            </a:r>
+            <a:r>
+              <a:rPr lang="en-US" altLang="ko-KR" dirty="0" smtClean="0">
+                <a:latin typeface="Noto Sans CJK KR Regular" pitchFamily="34" charset="-127"/>
+                <a:ea typeface="Noto Sans CJK KR Regular" pitchFamily="34" charset="-127"/>
+              </a:rPr>
+              <a:t>.</a:t>
+            </a:r>
+            <a:endParaRPr lang="en-US" dirty="0" smtClean="0">
+              <a:latin typeface="Noto Sans CJK KR Regular" pitchFamily="34" charset="-127"/>
+              <a:ea typeface="Noto Sans CJK KR Regular" pitchFamily="34" charset="-127"/>
+            </a:endParaRPr>
+          </a:p>
+        </p:txBody>
+      </p:sp>
+      <p:sp>
+        <p:nvSpPr>
+          <p:cNvPr id="248" name="Shape 248"/>
+          <p:cNvSpPr>
+            <a:spLocks noGrp="1"/>
+          </p:cNvSpPr>
+          <p:nvPr>
+            <p:ph type="sldNum" sz="quarter" idx="4294967295"/>
+          </p:nvPr>
+        </p:nvSpPr>
+        <p:spPr>
+          <a:xfrm>
+            <a:off x="6337172" y="9251950"/>
+            <a:ext cx="317755" cy="368300"/>
+          </a:xfrm>
+          <a:prstGeom prst="rect">
+            <a:avLst/>
+          </a:prstGeom>
+          <a:extLst>
+            <a:ext uri="{C572A759-6A51-4108-AA02-DFA0A04FC94B}">
+              <ma14:wrappingTextBoxFlag xmlns="" xmlns:ma14="http://schemas.microsoft.com/office/mac/drawingml/2011/main" val="1"/>
+            </a:ext>
+          </a:extLst>
+        </p:spPr>
+        <p:txBody>
+          <a:bodyPr/>
+          <a:lstStyle/>
+          <a:p>
+            <a:fld id="{86CB4B4D-7CA3-9044-876B-883B54F8677D}" type="slidenum">
+              <a:t>22</a:t>
+            </a:fld>
+            <a:endParaRPr/>
+          </a:p>
+        </p:txBody>
+      </p:sp>
+      <p:pic>
+        <p:nvPicPr>
+          <p:cNvPr id="2050" name="Picture 2"/>
+          <p:cNvPicPr>
+            <a:picLocks noChangeAspect="1" noChangeArrowheads="1"/>
+          </p:cNvPicPr>
+          <p:nvPr/>
+        </p:nvPicPr>
+        <p:blipFill>
+          <a:blip r:embed="rId2">
+            <a:extLst>
+              <a:ext uri="{28A0092B-C50C-407E-A947-70E740481C1C}">
+                <a14:useLocalDpi xmlns:a14="http://schemas.microsoft.com/office/drawing/2010/main" val="0"/>
+              </a:ext>
+            </a:extLst>
+          </a:blip>
+          <a:srcRect/>
+          <a:stretch>
+            <a:fillRect/>
+          </a:stretch>
+        </p:blipFill>
+        <p:spPr bwMode="auto">
+          <a:xfrm>
+            <a:off x="593715" y="1492424"/>
+            <a:ext cx="7191396" cy="3816424"/>
+          </a:xfrm>
+          <a:prstGeom prst="rect">
+            <a:avLst/>
+          </a:prstGeom>
+          <a:noFill/>
+          <a:ln>
+            <a:noFill/>
+          </a:ln>
+          <a:extLst>
+            <a:ext uri="{909E8E84-426E-40DD-AFC4-6F175D3DCCD1}">
+              <a14:hiddenFill xmlns:a14="http://schemas.microsoft.com/office/drawing/2010/main">
+                <a:solidFill>
+                  <a:schemeClr val="accent1"/>
+                </a:solidFill>
+              </a14:hiddenFill>
+            </a:ext>
+            <a:ext uri="{91240B29-F687-4F45-9708-019B960494DF}">
+              <a14:hiddenLine xmlns:a14="http://schemas.microsoft.com/office/drawing/2010/main" w="9525">
+                <a:solidFill>
+                  <a:schemeClr val="tx1"/>
+                </a:solidFill>
+                <a:miter lim="800000"/>
+                <a:headEnd/>
+                <a:tailEnd/>
+              </a14:hiddenLine>
+            </a:ext>
+          </a:extLst>
+        </p:spPr>
+      </p:pic>
+      <p:pic>
+        <p:nvPicPr>
+          <p:cNvPr id="2051" name="Picture 3"/>
+          <p:cNvPicPr>
+            <a:picLocks noChangeAspect="1" noChangeArrowheads="1"/>
+          </p:cNvPicPr>
+          <p:nvPr/>
+        </p:nvPicPr>
+        <p:blipFill>
+          <a:blip r:embed="rId3">
+            <a:extLst>
+              <a:ext uri="{28A0092B-C50C-407E-A947-70E740481C1C}">
+                <a14:useLocalDpi xmlns:a14="http://schemas.microsoft.com/office/drawing/2010/main" val="0"/>
+              </a:ext>
+            </a:extLst>
+          </a:blip>
+          <a:srcRect/>
+          <a:stretch>
+            <a:fillRect/>
+          </a:stretch>
+        </p:blipFill>
+        <p:spPr bwMode="auto">
+          <a:xfrm>
+            <a:off x="2325936" y="4101785"/>
+            <a:ext cx="10382250" cy="3733800"/>
+          </a:xfrm>
+          <a:prstGeom prst="rect">
+            <a:avLst/>
+          </a:prstGeom>
+          <a:noFill/>
+          <a:ln>
+            <a:noFill/>
+          </a:ln>
+          <a:extLst>
+            <a:ext uri="{909E8E84-426E-40DD-AFC4-6F175D3DCCD1}">
+              <a14:hiddenFill xmlns:a14="http://schemas.microsoft.com/office/drawing/2010/main">
+                <a:solidFill>
+                  <a:schemeClr val="accent1"/>
+                </a:solidFill>
+              </a14:hiddenFill>
+            </a:ext>
+            <a:ext uri="{91240B29-F687-4F45-9708-019B960494DF}">
+              <a14:hiddenLine xmlns:a14="http://schemas.microsoft.com/office/drawing/2010/main" w="9525">
+                <a:solidFill>
+                  <a:schemeClr val="tx1"/>
+                </a:solidFill>
+                <a:miter lim="800000"/>
+                <a:headEnd/>
+                <a:tailEnd/>
+              </a14:hiddenLine>
+            </a:ext>
+          </a:extLst>
+        </p:spPr>
+      </p:pic>
+      <p:sp>
+        <p:nvSpPr>
+          <p:cNvPr id="2" name="아래쪽 화살표 1"/>
+          <p:cNvSpPr/>
+          <p:nvPr/>
+        </p:nvSpPr>
+        <p:spPr>
+          <a:xfrm rot="19750324">
+            <a:off x="4393662" y="3633733"/>
+            <a:ext cx="504056" cy="936104"/>
+          </a:xfrm>
+          <a:prstGeom prst="downArrow">
+            <a:avLst/>
+          </a:prstGeom>
+          <a:blipFill rotWithShape="1">
+            <a:blip r:embed="rId4"/>
+            <a:srcRect/>
+            <a:tile tx="0" ty="0" sx="100000" sy="100000" flip="none" algn="tl"/>
+          </a:blipFill>
+          <a:ln w="12700" cap="flat">
+            <a:noFill/>
+            <a:miter lim="400000"/>
+          </a:ln>
+          <a:effectLst>
+            <a:outerShdw blurRad="38100" dist="25400" dir="5400000" rotWithShape="0">
+              <a:srgbClr val="000000">
+                <a:alpha val="50000"/>
+              </a:srgbClr>
+            </a:outerShdw>
+          </a:effectLst>
+          <a:sp3d/>
+        </p:spPr>
+        <p:style>
+          <a:lnRef idx="0">
+            <a:scrgbClr r="0" g="0" b="0"/>
+          </a:lnRef>
+          <a:fillRef idx="0">
+            <a:scrgbClr r="0" g="0" b="0"/>
+          </a:fillRef>
+          <a:effectRef idx="0">
+            <a:scrgbClr r="0" g="0" b="0"/>
+          </a:effectRef>
+          <a:fontRef idx="none"/>
+        </p:style>
+        <p:txBody>
+          <a:bodyPr rot="0" spcFirstLastPara="1" vertOverflow="overflow" horzOverflow="overflow" vert="horz" wrap="square" lIns="50800" tIns="50800" rIns="50800" bIns="50800" numCol="1" spcCol="38100" rtlCol="0" anchor="ctr">
+            <a:spAutoFit/>
+          </a:bodyPr>
+          <a:lstStyle/>
+          <a:p>
+            <a:pPr marL="0" marR="0" indent="0" algn="ctr" defTabSz="584200" rtl="0" fontAlgn="auto" latinLnBrk="0" hangingPunct="0">
+              <a:lnSpc>
+                <a:spcPct val="100000"/>
+              </a:lnSpc>
+              <a:spcBef>
+                <a:spcPts val="0"/>
+              </a:spcBef>
+              <a:spcAft>
+                <a:spcPts val="0"/>
+              </a:spcAft>
+              <a:buClrTx/>
+              <a:buSzTx/>
+              <a:buFontTx/>
+              <a:buNone/>
+              <a:tabLst/>
+            </a:pPr>
+            <a:endParaRPr kumimoji="0" lang="ko-KR" altLang="en-US" sz="2400" b="0" i="0" u="none" strike="noStrike" cap="none" spc="0" normalizeH="0" baseline="0">
+              <a:ln>
+                <a:noFill/>
+              </a:ln>
+              <a:solidFill>
+                <a:srgbClr val="FFFFFF"/>
+              </a:solidFill>
+              <a:effectLst/>
+              <a:uFillTx/>
+              <a:latin typeface="+mn-lt"/>
+              <a:ea typeface="+mn-ea"/>
+              <a:cs typeface="+mn-cs"/>
+              <a:sym typeface="Apple SD 산돌고딕 Neo 옅은체"/>
+            </a:endParaRPr>
+          </a:p>
+        </p:txBody>
+      </p:sp>
+    </p:spTree>
+    <p:extLst>
+      <p:ext uri="{BB962C8B-B14F-4D97-AF65-F5344CB8AC3E}">
+        <p14:creationId xmlns:p14="http://schemas.microsoft.com/office/powerpoint/2010/main" val="2437074400"/>
+      </p:ext>
+    </p:extLst>
+  </p:cSld>
+  <p:clrMapOvr>
+    <a:masterClrMapping/>
+  </p:clrMapOvr>
+  <p:transition spd="slow"/>
+</p:sld>
+</file>
+
+<file path=ppt/slides/slide23.xml><?xml version="1.0" encoding="utf-8"?>
+<p:sld xmlns:a="http://schemas.openxmlformats.org/drawingml/2006/main" xmlns:r="http://schemas.openxmlformats.org/officeDocument/2006/relationships" xmlns:p="http://schemas.openxmlformats.org/presentationml/2006/main">
+  <p:cSld>
+    <p:spTree>
+      <p:nvGrpSpPr>
+        <p:cNvPr id="1" name=""/>
+        <p:cNvGrpSpPr/>
+        <p:nvPr/>
+      </p:nvGrpSpPr>
+      <p:grpSpPr>
+        <a:xfrm>
+          <a:off x="0" y="0"/>
+          <a:ext cx="0" cy="0"/>
+          <a:chOff x="0" y="0"/>
+          <a:chExt cx="0" cy="0"/>
+        </a:xfrm>
+      </p:grpSpPr>
+      <p:sp>
+        <p:nvSpPr>
+          <p:cNvPr id="245" name="Shape 245"/>
+          <p:cNvSpPr/>
+          <p:nvPr/>
+        </p:nvSpPr>
+        <p:spPr>
+          <a:xfrm>
+            <a:off x="483755" y="250300"/>
+            <a:ext cx="4070025" cy="502702"/>
+          </a:xfrm>
+          <a:prstGeom prst="rect">
+            <a:avLst/>
+          </a:prstGeom>
+          <a:ln w="12700">
+            <a:miter lim="400000"/>
+          </a:ln>
+          <a:extLst>
+            <a:ext uri="{C572A759-6A51-4108-AA02-DFA0A04FC94B}">
+              <ma14:wrappingTextBoxFlag xmlns="" xmlns:ma14="http://schemas.microsoft.com/office/mac/drawingml/2011/main" val="1"/>
+            </a:ext>
+          </a:extLst>
+        </p:spPr>
+        <p:txBody>
+          <a:bodyPr wrap="none" lIns="50800" tIns="50800" rIns="50800" bIns="50800" anchor="ctr">
+            <a:spAutoFit/>
+          </a:bodyPr>
+          <a:lstStyle>
+            <a:lvl1pPr algn="l">
+              <a:defRPr sz="2600"/>
+            </a:lvl1pPr>
+          </a:lstStyle>
+          <a:p>
+            <a:r>
+              <a:rPr dirty="0" smtClean="0">
+                <a:latin typeface="Noto Sans CJK KR Regular" pitchFamily="34" charset="-127"/>
+                <a:ea typeface="Noto Sans CJK KR Regular" pitchFamily="34" charset="-127"/>
+              </a:rPr>
+              <a:t>1</a:t>
+            </a:r>
+            <a:r>
+              <a:rPr lang="en-US" dirty="0" smtClean="0">
+                <a:latin typeface="Noto Sans CJK KR Regular" pitchFamily="34" charset="-127"/>
+                <a:ea typeface="Noto Sans CJK KR Regular" pitchFamily="34" charset="-127"/>
+              </a:rPr>
+              <a:t>5-1</a:t>
+            </a:r>
+            <a:r>
+              <a:rPr dirty="0" smtClean="0">
+                <a:latin typeface="Noto Sans CJK KR Regular" pitchFamily="34" charset="-127"/>
+                <a:ea typeface="Noto Sans CJK KR Regular" pitchFamily="34" charset="-127"/>
+              </a:rPr>
+              <a:t>. </a:t>
+            </a:r>
+            <a:r>
+              <a:rPr lang="ko-KR" altLang="en-US" dirty="0" smtClean="0">
+                <a:latin typeface="Noto Sans CJK KR Regular" pitchFamily="34" charset="-127"/>
+                <a:ea typeface="Noto Sans CJK KR Regular" pitchFamily="34" charset="-127"/>
+              </a:rPr>
+              <a:t>정산 관리하기 </a:t>
+            </a:r>
+            <a:r>
+              <a:rPr lang="en-US" altLang="ko-KR" dirty="0" smtClean="0">
+                <a:latin typeface="Noto Sans CJK KR Regular" pitchFamily="34" charset="-127"/>
+                <a:ea typeface="Noto Sans CJK KR Regular" pitchFamily="34" charset="-127"/>
+              </a:rPr>
+              <a:t>(</a:t>
+            </a:r>
+            <a:r>
+              <a:rPr lang="ko-KR" altLang="en-US" dirty="0" smtClean="0">
+                <a:latin typeface="Noto Sans CJK KR Regular" pitchFamily="34" charset="-127"/>
+                <a:ea typeface="Noto Sans CJK KR Regular" pitchFamily="34" charset="-127"/>
+              </a:rPr>
+              <a:t>기간별</a:t>
+            </a:r>
+            <a:r>
+              <a:rPr lang="en-US" altLang="ko-KR" dirty="0" smtClean="0">
+                <a:latin typeface="Noto Sans CJK KR Regular" pitchFamily="34" charset="-127"/>
+                <a:ea typeface="Noto Sans CJK KR Regular" pitchFamily="34" charset="-127"/>
+              </a:rPr>
+              <a:t>)</a:t>
+            </a:r>
+            <a:endParaRPr dirty="0">
+              <a:latin typeface="Noto Sans CJK KR Regular" pitchFamily="34" charset="-127"/>
+              <a:ea typeface="Noto Sans CJK KR Regular" pitchFamily="34" charset="-127"/>
+            </a:endParaRPr>
+          </a:p>
+        </p:txBody>
+      </p:sp>
+      <p:sp>
+        <p:nvSpPr>
+          <p:cNvPr id="246" name="Shape 246"/>
+          <p:cNvSpPr/>
+          <p:nvPr/>
+        </p:nvSpPr>
+        <p:spPr>
+          <a:xfrm>
+            <a:off x="447774" y="977900"/>
+            <a:ext cx="12109253" cy="0"/>
+          </a:xfrm>
+          <a:prstGeom prst="line">
+            <a:avLst/>
+          </a:prstGeom>
+          <a:ln w="25400">
+            <a:solidFill>
+              <a:srgbClr val="000000"/>
+            </a:solidFill>
+            <a:miter lim="400000"/>
+          </a:ln>
+        </p:spPr>
+        <p:txBody>
+          <a:bodyPr lIns="50800" tIns="50800" rIns="50800" bIns="50800" anchor="ctr"/>
+          <a:lstStyle/>
+          <a:p>
+            <a:pPr>
+              <a:defRPr sz="2400"/>
+            </a:pPr>
+            <a:endParaRPr/>
+          </a:p>
+        </p:txBody>
+      </p:sp>
+      <p:sp>
+        <p:nvSpPr>
+          <p:cNvPr id="247" name="Shape 247"/>
+          <p:cNvSpPr/>
+          <p:nvPr/>
+        </p:nvSpPr>
+        <p:spPr>
+          <a:xfrm>
+            <a:off x="741760" y="6460976"/>
+            <a:ext cx="8098371" cy="933589"/>
+          </a:xfrm>
+          <a:prstGeom prst="rect">
+            <a:avLst/>
+          </a:prstGeom>
+          <a:ln w="12700">
+            <a:miter lim="400000"/>
+          </a:ln>
+          <a:extLst>
+            <a:ext uri="{C572A759-6A51-4108-AA02-DFA0A04FC94B}">
+              <ma14:wrappingTextBoxFlag xmlns="" xmlns:ma14="http://schemas.microsoft.com/office/mac/drawingml/2011/main" val="1"/>
+            </a:ext>
+          </a:extLst>
+        </p:spPr>
+        <p:txBody>
+          <a:bodyPr wrap="none" lIns="50800" tIns="50800" rIns="50800" bIns="50800" anchor="ctr">
+            <a:spAutoFit/>
+          </a:bodyPr>
+          <a:lstStyle/>
+          <a:p>
+            <a:pPr algn="l">
+              <a:defRPr sz="1800"/>
+            </a:pPr>
+            <a:r>
+              <a:rPr lang="ko-KR" altLang="en-US" dirty="0" smtClean="0">
+                <a:latin typeface="Noto Sans CJK KR Regular" pitchFamily="34" charset="-127"/>
+                <a:ea typeface="Noto Sans CJK KR Regular" pitchFamily="34" charset="-127"/>
+              </a:rPr>
+              <a:t>① </a:t>
+            </a:r>
+            <a:r>
+              <a:rPr lang="ko-KR" altLang="en-US" dirty="0" smtClean="0">
+                <a:latin typeface="Noto Sans CJK KR Regular" pitchFamily="34" charset="-127"/>
+                <a:ea typeface="Noto Sans CJK KR Regular" pitchFamily="34" charset="-127"/>
+              </a:rPr>
+              <a:t>기간별 정산관리에서 해당 기간 내 전체 업체의 주문 금액 등을 확인할 수 있습니다</a:t>
+            </a:r>
+            <a:r>
+              <a:rPr lang="en-US" altLang="ko-KR" dirty="0" smtClean="0">
+                <a:latin typeface="Noto Sans CJK KR Regular" pitchFamily="34" charset="-127"/>
+                <a:ea typeface="Noto Sans CJK KR Regular" pitchFamily="34" charset="-127"/>
+              </a:rPr>
+              <a:t>. </a:t>
+            </a:r>
+          </a:p>
+          <a:p>
+            <a:pPr algn="l">
+              <a:defRPr sz="1800"/>
+            </a:pPr>
+            <a:endParaRPr lang="en-US" altLang="ko-KR" dirty="0" smtClean="0">
+              <a:latin typeface="Noto Sans CJK KR Regular" pitchFamily="34" charset="-127"/>
+              <a:ea typeface="Noto Sans CJK KR Regular" pitchFamily="34" charset="-127"/>
+            </a:endParaRPr>
+          </a:p>
+          <a:p>
+            <a:pPr algn="l">
+              <a:defRPr sz="1800"/>
+            </a:pPr>
+            <a:r>
+              <a:rPr lang="en-US" altLang="ko-KR" dirty="0" smtClean="0">
+                <a:latin typeface="Noto Sans CJK KR Regular" pitchFamily="34" charset="-127"/>
+                <a:ea typeface="Noto Sans CJK KR Regular" pitchFamily="34" charset="-127"/>
+              </a:rPr>
+              <a:t>※ </a:t>
+            </a:r>
+            <a:r>
+              <a:rPr lang="ko-KR" altLang="en-US" dirty="0" smtClean="0">
+                <a:latin typeface="Noto Sans CJK KR Regular" pitchFamily="34" charset="-127"/>
+                <a:ea typeface="Noto Sans CJK KR Regular" pitchFamily="34" charset="-127"/>
+              </a:rPr>
+              <a:t> </a:t>
+            </a:r>
+            <a:r>
+              <a:rPr lang="ko-KR" altLang="en-US" dirty="0" err="1" smtClean="0">
+                <a:latin typeface="Noto Sans CJK KR Regular" pitchFamily="34" charset="-127"/>
+                <a:ea typeface="Noto Sans CJK KR Regular" pitchFamily="34" charset="-127"/>
+              </a:rPr>
+              <a:t>배송완료건에</a:t>
+            </a:r>
+            <a:r>
+              <a:rPr lang="ko-KR" altLang="en-US" dirty="0" smtClean="0">
+                <a:latin typeface="Noto Sans CJK KR Regular" pitchFamily="34" charset="-127"/>
+                <a:ea typeface="Noto Sans CJK KR Regular" pitchFamily="34" charset="-127"/>
+              </a:rPr>
+              <a:t> 대해서만 목록에 나옵니다</a:t>
+            </a:r>
+            <a:r>
+              <a:rPr lang="en-US" altLang="ko-KR" dirty="0" smtClean="0">
+                <a:latin typeface="Noto Sans CJK KR Regular" pitchFamily="34" charset="-127"/>
+                <a:ea typeface="Noto Sans CJK KR Regular" pitchFamily="34" charset="-127"/>
+              </a:rPr>
+              <a:t>.</a:t>
+            </a:r>
+          </a:p>
+        </p:txBody>
+      </p:sp>
+      <p:sp>
+        <p:nvSpPr>
+          <p:cNvPr id="248" name="Shape 248"/>
+          <p:cNvSpPr>
+            <a:spLocks noGrp="1"/>
+          </p:cNvSpPr>
+          <p:nvPr>
+            <p:ph type="sldNum" sz="quarter" idx="4294967295"/>
+          </p:nvPr>
+        </p:nvSpPr>
+        <p:spPr>
+          <a:xfrm>
+            <a:off x="6337172" y="9251950"/>
+            <a:ext cx="317755" cy="368300"/>
+          </a:xfrm>
+          <a:prstGeom prst="rect">
+            <a:avLst/>
+          </a:prstGeom>
+          <a:extLst>
+            <a:ext uri="{C572A759-6A51-4108-AA02-DFA0A04FC94B}">
+              <ma14:wrappingTextBoxFlag xmlns="" xmlns:ma14="http://schemas.microsoft.com/office/mac/drawingml/2011/main" val="1"/>
+            </a:ext>
+          </a:extLst>
+        </p:spPr>
+        <p:txBody>
+          <a:bodyPr/>
+          <a:lstStyle/>
+          <a:p>
+            <a:fld id="{86CB4B4D-7CA3-9044-876B-883B54F8677D}" type="slidenum">
+              <a:t>23</a:t>
+            </a:fld>
+            <a:endParaRPr/>
+          </a:p>
+        </p:txBody>
+      </p:sp>
+      <p:pic>
+        <p:nvPicPr>
+          <p:cNvPr id="3074" name="Picture 2"/>
+          <p:cNvPicPr>
+            <a:picLocks noChangeAspect="1" noChangeArrowheads="1"/>
+          </p:cNvPicPr>
+          <p:nvPr/>
+        </p:nvPicPr>
+        <p:blipFill>
+          <a:blip r:embed="rId2">
+            <a:extLst>
+              <a:ext uri="{28A0092B-C50C-407E-A947-70E740481C1C}">
+                <a14:useLocalDpi xmlns:a14="http://schemas.microsoft.com/office/drawing/2010/main" val="0"/>
+              </a:ext>
+            </a:extLst>
+          </a:blip>
+          <a:srcRect/>
+          <a:stretch>
+            <a:fillRect/>
+          </a:stretch>
+        </p:blipFill>
+        <p:spPr bwMode="auto">
+          <a:xfrm>
+            <a:off x="830700" y="1708448"/>
+            <a:ext cx="11343399" cy="3960440"/>
+          </a:xfrm>
+          <a:prstGeom prst="rect">
+            <a:avLst/>
+          </a:prstGeom>
+          <a:noFill/>
+          <a:ln>
+            <a:noFill/>
+          </a:ln>
+          <a:extLst>
+            <a:ext uri="{909E8E84-426E-40DD-AFC4-6F175D3DCCD1}">
+              <a14:hiddenFill xmlns:a14="http://schemas.microsoft.com/office/drawing/2010/main">
+                <a:solidFill>
+                  <a:schemeClr val="accent1"/>
+                </a:solidFill>
+              </a14:hiddenFill>
+            </a:ext>
+            <a:ext uri="{91240B29-F687-4F45-9708-019B960494DF}">
+              <a14:hiddenLine xmlns:a14="http://schemas.microsoft.com/office/drawing/2010/main" w="9525">
+                <a:solidFill>
+                  <a:schemeClr val="tx1"/>
+                </a:solidFill>
+                <a:miter lim="800000"/>
+                <a:headEnd/>
+                <a:tailEnd/>
+              </a14:hiddenLine>
+            </a:ext>
+          </a:extLst>
+        </p:spPr>
+      </p:pic>
+    </p:spTree>
+    <p:extLst>
+      <p:ext uri="{BB962C8B-B14F-4D97-AF65-F5344CB8AC3E}">
+        <p14:creationId xmlns:p14="http://schemas.microsoft.com/office/powerpoint/2010/main" val="1446297273"/>
+      </p:ext>
+    </p:extLst>
+  </p:cSld>
+  <p:clrMapOvr>
+    <a:masterClrMapping/>
+  </p:clrMapOvr>
+  <p:transition spd="slow"/>
+</p:sld>
+</file>
+
+<file path=ppt/slides/slide24.xml><?xml version="1.0" encoding="utf-8"?>
+<p:sld xmlns:a="http://schemas.openxmlformats.org/drawingml/2006/main" xmlns:r="http://schemas.openxmlformats.org/officeDocument/2006/relationships" xmlns:p="http://schemas.openxmlformats.org/presentationml/2006/main">
+  <p:cSld>
+    <p:spTree>
+      <p:nvGrpSpPr>
+        <p:cNvPr id="1" name=""/>
+        <p:cNvGrpSpPr/>
+        <p:nvPr/>
+      </p:nvGrpSpPr>
+      <p:grpSpPr>
+        <a:xfrm>
+          <a:off x="0" y="0"/>
+          <a:ext cx="0" cy="0"/>
+          <a:chOff x="0" y="0"/>
+          <a:chExt cx="0" cy="0"/>
+        </a:xfrm>
+      </p:grpSpPr>
+      <p:sp>
+        <p:nvSpPr>
           <p:cNvPr id="233" name="Shape 233"/>
           <p:cNvSpPr/>
           <p:nvPr/>
@@ -13322,7 +15024,7 @@
           </a:ln>
           <a:extLst>
             <a:ext uri="{C572A759-6A51-4108-AA02-DFA0A04FC94B}">
-              <ma14:wrappingTextBoxFlag xmlns:ma14="http://schemas.microsoft.com/office/mac/drawingml/2011/main" xmlns="" val="1"/>
+              <ma14:wrappingTextBoxFlag xmlns="" xmlns:ma14="http://schemas.microsoft.com/office/mac/drawingml/2011/main" val="1"/>
             </a:ext>
           </a:extLst>
         </p:spPr>
@@ -13348,7 +15050,7 @@
                 <a:latin typeface="Noto Sans CJK KR Regular" pitchFamily="34" charset="-127"/>
                 <a:ea typeface="Noto Sans CJK KR Regular" pitchFamily="34" charset="-127"/>
               </a:rPr>
-              <a:t>4</a:t>
+              <a:t>6</a:t>
             </a:r>
             <a:r>
               <a:rPr dirty="0" smtClean="0">
@@ -13450,7 +15152,7 @@
           </a:ln>
           <a:extLst>
             <a:ext uri="{C572A759-6A51-4108-AA02-DFA0A04FC94B}">
-              <ma14:wrappingTextBoxFlag xmlns:ma14="http://schemas.microsoft.com/office/mac/drawingml/2011/main" xmlns="" val="1"/>
+              <ma14:wrappingTextBoxFlag xmlns="" xmlns:ma14="http://schemas.microsoft.com/office/mac/drawingml/2011/main" val="1"/>
             </a:ext>
           </a:extLst>
         </p:spPr>
@@ -14016,7 +15718,7 @@
           </a:prstGeom>
           <a:extLst>
             <a:ext uri="{C572A759-6A51-4108-AA02-DFA0A04FC94B}">
-              <ma14:wrappingTextBoxFlag xmlns:ma14="http://schemas.microsoft.com/office/mac/drawingml/2011/main" xmlns="" val="1"/>
+              <ma14:wrappingTextBoxFlag xmlns="" xmlns:ma14="http://schemas.microsoft.com/office/mac/drawingml/2011/main" val="1"/>
             </a:ext>
           </a:extLst>
         </p:spPr>
@@ -14025,7 +15727,7 @@
           <a:lstStyle/>
           <a:p>
             <a:fld id="{86CB4B4D-7CA3-9044-876B-883B54F8677D}" type="slidenum">
-              <a:t>21</a:t>
+              <a:t>24</a:t>
             </a:fld>
             <a:endParaRPr/>
           </a:p>
@@ -14148,7 +15850,7 @@
 </p:sld>
 </file>
 
-<file path=ppt/slides/slide22.xml><?xml version="1.0" encoding="utf-8"?>
+<file path=ppt/slides/slide25.xml><?xml version="1.0" encoding="utf-8"?>
 <p:sld xmlns:a="http://schemas.openxmlformats.org/drawingml/2006/main" xmlns:r="http://schemas.openxmlformats.org/officeDocument/2006/relationships" xmlns:p="http://schemas.openxmlformats.org/presentationml/2006/main">
   <p:cSld>
     <p:spTree>
@@ -14184,7 +15886,7 @@
           </a:ln>
           <a:extLst>
             <a:ext uri="{C572A759-6A51-4108-AA02-DFA0A04FC94B}">
-              <ma14:wrappingTextBoxFlag xmlns:ma14="http://schemas.microsoft.com/office/mac/drawingml/2011/main" xmlns="" val="1"/>
+              <ma14:wrappingTextBoxFlag xmlns="" xmlns:ma14="http://schemas.microsoft.com/office/mac/drawingml/2011/main" val="1"/>
             </a:ext>
           </a:extLst>
         </p:spPr>
@@ -14210,7 +15912,7 @@
                 <a:latin typeface="Noto Sans CJK KR Regular" pitchFamily="34" charset="-127"/>
                 <a:ea typeface="Noto Sans CJK KR Regular" pitchFamily="34" charset="-127"/>
               </a:rPr>
-              <a:t>5</a:t>
+              <a:t>7</a:t>
             </a:r>
             <a:r>
               <a:rPr dirty="0" smtClean="0">
@@ -14312,7 +16014,7 @@
           </a:ln>
           <a:extLst>
             <a:ext uri="{C572A759-6A51-4108-AA02-DFA0A04FC94B}">
-              <ma14:wrappingTextBoxFlag xmlns:ma14="http://schemas.microsoft.com/office/mac/drawingml/2011/main" xmlns="" val="1"/>
+              <ma14:wrappingTextBoxFlag xmlns="" xmlns:ma14="http://schemas.microsoft.com/office/mac/drawingml/2011/main" val="1"/>
             </a:ext>
           </a:extLst>
         </p:spPr>
@@ -14842,7 +16544,7 @@
           </a:prstGeom>
           <a:extLst>
             <a:ext uri="{C572A759-6A51-4108-AA02-DFA0A04FC94B}">
-              <ma14:wrappingTextBoxFlag xmlns:ma14="http://schemas.microsoft.com/office/mac/drawingml/2011/main" xmlns="" val="1"/>
+              <ma14:wrappingTextBoxFlag xmlns="" xmlns:ma14="http://schemas.microsoft.com/office/mac/drawingml/2011/main" val="1"/>
             </a:ext>
           </a:extLst>
         </p:spPr>
@@ -14851,7 +16553,7 @@
           <a:lstStyle/>
           <a:p>
             <a:fld id="{86CB4B4D-7CA3-9044-876B-883B54F8677D}" type="slidenum">
-              <a:t>22</a:t>
+              <a:t>25</a:t>
             </a:fld>
             <a:endParaRPr/>
           </a:p>
@@ -14920,7 +16622,7 @@
 </p:sld>
 </file>
 
-<file path=ppt/slides/slide23.xml><?xml version="1.0" encoding="utf-8"?>
+<file path=ppt/slides/slide26.xml><?xml version="1.0" encoding="utf-8"?>
 <p:sld xmlns:a="http://schemas.openxmlformats.org/drawingml/2006/main" xmlns:r="http://schemas.openxmlformats.org/officeDocument/2006/relationships" xmlns:p="http://schemas.openxmlformats.org/presentationml/2006/main">
   <p:cSld>
     <p:spTree>
@@ -14956,7 +16658,7 @@
           </a:ln>
           <a:extLst>
             <a:ext uri="{C572A759-6A51-4108-AA02-DFA0A04FC94B}">
-              <ma14:wrappingTextBoxFlag xmlns:ma14="http://schemas.microsoft.com/office/mac/drawingml/2011/main" xmlns="" val="1"/>
+              <ma14:wrappingTextBoxFlag xmlns="" xmlns:ma14="http://schemas.microsoft.com/office/mac/drawingml/2011/main" val="1"/>
             </a:ext>
           </a:extLst>
         </p:spPr>
@@ -14982,7 +16684,7 @@
                 <a:latin typeface="Noto Sans CJK KR Regular" pitchFamily="34" charset="-127"/>
                 <a:ea typeface="Noto Sans CJK KR Regular" pitchFamily="34" charset="-127"/>
               </a:rPr>
-              <a:t>6</a:t>
+              <a:t>8</a:t>
             </a:r>
             <a:r>
               <a:rPr dirty="0" smtClean="0">
@@ -15063,7 +16765,7 @@
           </a:ln>
           <a:extLst>
             <a:ext uri="{C572A759-6A51-4108-AA02-DFA0A04FC94B}">
-              <ma14:wrappingTextBoxFlag xmlns:ma14="http://schemas.microsoft.com/office/mac/drawingml/2011/main" xmlns="" val="1"/>
+              <ma14:wrappingTextBoxFlag xmlns="" xmlns:ma14="http://schemas.microsoft.com/office/mac/drawingml/2011/main" val="1"/>
             </a:ext>
           </a:extLst>
         </p:spPr>
@@ -15470,7 +17172,7 @@
           </a:prstGeom>
           <a:extLst>
             <a:ext uri="{C572A759-6A51-4108-AA02-DFA0A04FC94B}">
-              <ma14:wrappingTextBoxFlag xmlns:ma14="http://schemas.microsoft.com/office/mac/drawingml/2011/main" xmlns="" val="1"/>
+              <ma14:wrappingTextBoxFlag xmlns="" xmlns:ma14="http://schemas.microsoft.com/office/mac/drawingml/2011/main" val="1"/>
             </a:ext>
           </a:extLst>
         </p:spPr>
@@ -15479,7 +17181,7 @@
           <a:lstStyle/>
           <a:p>
             <a:fld id="{86CB4B4D-7CA3-9044-876B-883B54F8677D}" type="slidenum">
-              <a:t>23</a:t>
+              <a:t>26</a:t>
             </a:fld>
             <a:endParaRPr/>
           </a:p>
@@ -15548,7 +17250,7 @@
 </p:sld>
 </file>
 
-<file path=ppt/slides/slide24.xml><?xml version="1.0" encoding="utf-8"?>
+<file path=ppt/slides/slide27.xml><?xml version="1.0" encoding="utf-8"?>
 <p:sld xmlns:a="http://schemas.openxmlformats.org/drawingml/2006/main" xmlns:r="http://schemas.openxmlformats.org/officeDocument/2006/relationships" xmlns:p="http://schemas.openxmlformats.org/presentationml/2006/main">
   <p:cSld>
     <p:spTree>
@@ -15584,7 +17286,7 @@
           </a:ln>
           <a:extLst>
             <a:ext uri="{C572A759-6A51-4108-AA02-DFA0A04FC94B}">
-              <ma14:wrappingTextBoxFlag xmlns:ma14="http://schemas.microsoft.com/office/mac/drawingml/2011/main" xmlns="" val="1"/>
+              <ma14:wrappingTextBoxFlag xmlns="" xmlns:ma14="http://schemas.microsoft.com/office/mac/drawingml/2011/main" val="1"/>
             </a:ext>
           </a:extLst>
         </p:spPr>
@@ -15610,7 +17312,7 @@
                 <a:latin typeface="Noto Sans CJK KR Regular" pitchFamily="34" charset="-127"/>
                 <a:ea typeface="Noto Sans CJK KR Regular" pitchFamily="34" charset="-127"/>
               </a:rPr>
-              <a:t>7</a:t>
+              <a:t>9</a:t>
             </a:r>
             <a:r>
               <a:rPr dirty="0" smtClean="0">
@@ -15691,7 +17393,7 @@
           </a:ln>
           <a:extLst>
             <a:ext uri="{C572A759-6A51-4108-AA02-DFA0A04FC94B}">
-              <ma14:wrappingTextBoxFlag xmlns:ma14="http://schemas.microsoft.com/office/mac/drawingml/2011/main" xmlns="" val="1"/>
+              <ma14:wrappingTextBoxFlag xmlns="" xmlns:ma14="http://schemas.microsoft.com/office/mac/drawingml/2011/main" val="1"/>
             </a:ext>
           </a:extLst>
         </p:spPr>
@@ -15806,7 +17508,7 @@
           </a:prstGeom>
           <a:extLst>
             <a:ext uri="{C572A759-6A51-4108-AA02-DFA0A04FC94B}">
-              <ma14:wrappingTextBoxFlag xmlns:ma14="http://schemas.microsoft.com/office/mac/drawingml/2011/main" xmlns="" val="1"/>
+              <ma14:wrappingTextBoxFlag xmlns="" xmlns:ma14="http://schemas.microsoft.com/office/mac/drawingml/2011/main" val="1"/>
             </a:ext>
           </a:extLst>
         </p:spPr>
@@ -15815,7 +17517,7 @@
           <a:lstStyle/>
           <a:p>
             <a:fld id="{86CB4B4D-7CA3-9044-876B-883B54F8677D}" type="slidenum">
-              <a:t>24</a:t>
+              <a:t>27</a:t>
             </a:fld>
             <a:endParaRPr/>
           </a:p>
@@ -15889,7 +17591,7 @@
 </p:sld>
 </file>
 
-<file path=ppt/slides/slide25.xml><?xml version="1.0" encoding="utf-8"?>
+<file path=ppt/slides/slide28.xml><?xml version="1.0" encoding="utf-8"?>
 <p:sld xmlns:a="http://schemas.openxmlformats.org/drawingml/2006/main" xmlns:r="http://schemas.openxmlformats.org/officeDocument/2006/relationships" xmlns:p="http://schemas.openxmlformats.org/presentationml/2006/main">
   <p:cSld>
     <p:spTree>
@@ -15925,7 +17627,7 @@
           </a:ln>
           <a:extLst>
             <a:ext uri="{C572A759-6A51-4108-AA02-DFA0A04FC94B}">
-              <ma14:wrappingTextBoxFlag xmlns:ma14="http://schemas.microsoft.com/office/mac/drawingml/2011/main" xmlns="" val="1"/>
+              <ma14:wrappingTextBoxFlag xmlns="" xmlns:ma14="http://schemas.microsoft.com/office/mac/drawingml/2011/main" val="1"/>
             </a:ext>
           </a:extLst>
         </p:spPr>
@@ -16004,7 +17706,7 @@
           </a:ln>
           <a:extLst>
             <a:ext uri="{C572A759-6A51-4108-AA02-DFA0A04FC94B}">
-              <ma14:wrappingTextBoxFlag xmlns:ma14="http://schemas.microsoft.com/office/mac/drawingml/2011/main" xmlns="" val="1"/>
+              <ma14:wrappingTextBoxFlag xmlns="" xmlns:ma14="http://schemas.microsoft.com/office/mac/drawingml/2011/main" val="1"/>
             </a:ext>
           </a:extLst>
         </p:spPr>
@@ -16098,7 +17800,7 @@
           </a:prstGeom>
           <a:extLst>
             <a:ext uri="{C572A759-6A51-4108-AA02-DFA0A04FC94B}">
-              <ma14:wrappingTextBoxFlag xmlns:ma14="http://schemas.microsoft.com/office/mac/drawingml/2011/main" xmlns="" val="1"/>
+              <ma14:wrappingTextBoxFlag xmlns="" xmlns:ma14="http://schemas.microsoft.com/office/mac/drawingml/2011/main" val="1"/>
             </a:ext>
           </a:extLst>
         </p:spPr>
@@ -16107,7 +17809,7 @@
           <a:lstStyle/>
           <a:p>
             <a:fld id="{86CB4B4D-7CA3-9044-876B-883B54F8677D}" type="slidenum">
-              <a:t>25</a:t>
+              <a:t>28</a:t>
             </a:fld>
             <a:endParaRPr/>
           </a:p>
@@ -16236,7 +17938,7 @@
           </a:ln>
           <a:extLst>
             <a:ext uri="{C572A759-6A51-4108-AA02-DFA0A04FC94B}">
-              <ma14:wrappingTextBoxFlag xmlns:ma14="http://schemas.microsoft.com/office/mac/drawingml/2011/main" xmlns="" val="1"/>
+              <ma14:wrappingTextBoxFlag xmlns="" xmlns:ma14="http://schemas.microsoft.com/office/mac/drawingml/2011/main" val="1"/>
             </a:ext>
           </a:extLst>
         </p:spPr>
@@ -16592,7 +18294,7 @@
           </a:prstGeom>
           <a:extLst>
             <a:ext uri="{C572A759-6A51-4108-AA02-DFA0A04FC94B}">
-              <ma14:wrappingTextBoxFlag xmlns:ma14="http://schemas.microsoft.com/office/mac/drawingml/2011/main" xmlns="" val="1"/>
+              <ma14:wrappingTextBoxFlag xmlns="" xmlns:ma14="http://schemas.microsoft.com/office/mac/drawingml/2011/main" val="1"/>
             </a:ext>
           </a:extLst>
         </p:spPr>
@@ -16626,7 +18328,7 @@
           </a:ln>
           <a:extLst>
             <a:ext uri="{C572A759-6A51-4108-AA02-DFA0A04FC94B}">
-              <ma14:wrappingTextBoxFlag xmlns:ma14="http://schemas.microsoft.com/office/mac/drawingml/2011/main" xmlns="" val="1"/>
+              <ma14:wrappingTextBoxFlag xmlns="" xmlns:ma14="http://schemas.microsoft.com/office/mac/drawingml/2011/main" val="1"/>
             </a:ext>
           </a:extLst>
         </p:spPr>
@@ -16820,7 +18522,7 @@
           </a:ln>
           <a:extLst>
             <a:ext uri="{C572A759-6A51-4108-AA02-DFA0A04FC94B}">
-              <ma14:wrappingTextBoxFlag xmlns:ma14="http://schemas.microsoft.com/office/mac/drawingml/2011/main" xmlns="" val="1"/>
+              <ma14:wrappingTextBoxFlag xmlns="" xmlns:ma14="http://schemas.microsoft.com/office/mac/drawingml/2011/main" val="1"/>
             </a:ext>
           </a:extLst>
         </p:spPr>
@@ -17375,7 +19077,7 @@
           </a:ln>
           <a:extLst>
             <a:ext uri="{C572A759-6A51-4108-AA02-DFA0A04FC94B}">
-              <ma14:wrappingTextBoxFlag xmlns:ma14="http://schemas.microsoft.com/office/mac/drawingml/2011/main" xmlns="" val="1"/>
+              <ma14:wrappingTextBoxFlag xmlns="" xmlns:ma14="http://schemas.microsoft.com/office/mac/drawingml/2011/main" val="1"/>
             </a:ext>
           </a:extLst>
         </p:spPr>
@@ -17493,7 +19195,7 @@
           </a:prstGeom>
           <a:extLst>
             <a:ext uri="{C572A759-6A51-4108-AA02-DFA0A04FC94B}">
-              <ma14:wrappingTextBoxFlag xmlns:ma14="http://schemas.microsoft.com/office/mac/drawingml/2011/main" xmlns="" val="1"/>
+              <ma14:wrappingTextBoxFlag xmlns="" xmlns:ma14="http://schemas.microsoft.com/office/mac/drawingml/2011/main" val="1"/>
             </a:ext>
           </a:extLst>
         </p:spPr>
@@ -17582,7 +19284,7 @@
           </a:ln>
           <a:extLst>
             <a:ext uri="{C572A759-6A51-4108-AA02-DFA0A04FC94B}">
-              <ma14:wrappingTextBoxFlag xmlns:ma14="http://schemas.microsoft.com/office/mac/drawingml/2011/main" xmlns="" val="1"/>
+              <ma14:wrappingTextBoxFlag xmlns="" xmlns:ma14="http://schemas.microsoft.com/office/mac/drawingml/2011/main" val="1"/>
             </a:ext>
           </a:extLst>
         </p:spPr>
@@ -17696,7 +19398,7 @@
           </a:ln>
           <a:extLst>
             <a:ext uri="{C572A759-6A51-4108-AA02-DFA0A04FC94B}">
-              <ma14:wrappingTextBoxFlag xmlns:ma14="http://schemas.microsoft.com/office/mac/drawingml/2011/main" xmlns="" val="1"/>
+              <ma14:wrappingTextBoxFlag xmlns="" xmlns:ma14="http://schemas.microsoft.com/office/mac/drawingml/2011/main" val="1"/>
             </a:ext>
           </a:extLst>
         </p:spPr>
@@ -18038,7 +19740,7 @@
           </a:prstGeom>
           <a:extLst>
             <a:ext uri="{C572A759-6A51-4108-AA02-DFA0A04FC94B}">
-              <ma14:wrappingTextBoxFlag xmlns:ma14="http://schemas.microsoft.com/office/mac/drawingml/2011/main" xmlns="" val="1"/>
+              <ma14:wrappingTextBoxFlag xmlns="" xmlns:ma14="http://schemas.microsoft.com/office/mac/drawingml/2011/main" val="1"/>
             </a:ext>
           </a:extLst>
         </p:spPr>
@@ -18184,7 +19886,7 @@
           </a:ln>
           <a:extLst>
             <a:ext uri="{C572A759-6A51-4108-AA02-DFA0A04FC94B}">
-              <ma14:wrappingTextBoxFlag xmlns:ma14="http://schemas.microsoft.com/office/mac/drawingml/2011/main" xmlns="" val="1"/>
+              <ma14:wrappingTextBoxFlag xmlns="" xmlns:ma14="http://schemas.microsoft.com/office/mac/drawingml/2011/main" val="1"/>
             </a:ext>
           </a:extLst>
         </p:spPr>
@@ -18472,7 +20174,7 @@
           </a:ln>
           <a:extLst>
             <a:ext uri="{C572A759-6A51-4108-AA02-DFA0A04FC94B}">
-              <ma14:wrappingTextBoxFlag xmlns:ma14="http://schemas.microsoft.com/office/mac/drawingml/2011/main" xmlns="" val="1"/>
+              <ma14:wrappingTextBoxFlag xmlns="" xmlns:ma14="http://schemas.microsoft.com/office/mac/drawingml/2011/main" val="1"/>
             </a:ext>
           </a:extLst>
         </p:spPr>
@@ -18569,7 +20271,7 @@
           </a:prstGeom>
           <a:extLst>
             <a:ext uri="{C572A759-6A51-4108-AA02-DFA0A04FC94B}">
-              <ma14:wrappingTextBoxFlag xmlns:ma14="http://schemas.microsoft.com/office/mac/drawingml/2011/main" xmlns="" val="1"/>
+              <ma14:wrappingTextBoxFlag xmlns="" xmlns:ma14="http://schemas.microsoft.com/office/mac/drawingml/2011/main" val="1"/>
             </a:ext>
           </a:extLst>
         </p:spPr>
@@ -18715,7 +20417,7 @@
           </a:ln>
           <a:extLst>
             <a:ext uri="{C572A759-6A51-4108-AA02-DFA0A04FC94B}">
-              <ma14:wrappingTextBoxFlag xmlns:ma14="http://schemas.microsoft.com/office/mac/drawingml/2011/main" xmlns="" val="1"/>
+              <ma14:wrappingTextBoxFlag xmlns="" xmlns:ma14="http://schemas.microsoft.com/office/mac/drawingml/2011/main" val="1"/>
             </a:ext>
           </a:extLst>
         </p:spPr>
@@ -19367,7 +21069,7 @@
           </a:ln>
           <a:extLst>
             <a:ext uri="{C572A759-6A51-4108-AA02-DFA0A04FC94B}">
-              <ma14:wrappingTextBoxFlag xmlns:ma14="http://schemas.microsoft.com/office/mac/drawingml/2011/main" xmlns="" val="1"/>
+              <ma14:wrappingTextBoxFlag xmlns="" xmlns:ma14="http://schemas.microsoft.com/office/mac/drawingml/2011/main" val="1"/>
             </a:ext>
           </a:extLst>
         </p:spPr>
@@ -19464,7 +21166,7 @@
           </a:prstGeom>
           <a:extLst>
             <a:ext uri="{C572A759-6A51-4108-AA02-DFA0A04FC94B}">
-              <ma14:wrappingTextBoxFlag xmlns:ma14="http://schemas.microsoft.com/office/mac/drawingml/2011/main" xmlns="" val="1"/>
+              <ma14:wrappingTextBoxFlag xmlns="" xmlns:ma14="http://schemas.microsoft.com/office/mac/drawingml/2011/main" val="1"/>
             </a:ext>
           </a:extLst>
         </p:spPr>
@@ -19610,7 +21312,7 @@
           </a:ln>
           <a:extLst>
             <a:ext uri="{C572A759-6A51-4108-AA02-DFA0A04FC94B}">
-              <ma14:wrappingTextBoxFlag xmlns:ma14="http://schemas.microsoft.com/office/mac/drawingml/2011/main" xmlns="" val="1"/>
+              <ma14:wrappingTextBoxFlag xmlns="" xmlns:ma14="http://schemas.microsoft.com/office/mac/drawingml/2011/main" val="1"/>
             </a:ext>
           </a:extLst>
         </p:spPr>
@@ -19794,7 +21496,7 @@
           </a:ln>
           <a:extLst>
             <a:ext uri="{C572A759-6A51-4108-AA02-DFA0A04FC94B}">
-              <ma14:wrappingTextBoxFlag xmlns:ma14="http://schemas.microsoft.com/office/mac/drawingml/2011/main" xmlns="" val="1"/>
+              <ma14:wrappingTextBoxFlag xmlns="" xmlns:ma14="http://schemas.microsoft.com/office/mac/drawingml/2011/main" val="1"/>
             </a:ext>
           </a:extLst>
         </p:spPr>
@@ -19891,7 +21593,7 @@
           </a:prstGeom>
           <a:extLst>
             <a:ext uri="{C572A759-6A51-4108-AA02-DFA0A04FC94B}">
-              <ma14:wrappingTextBoxFlag xmlns:ma14="http://schemas.microsoft.com/office/mac/drawingml/2011/main" xmlns="" val="1"/>
+              <ma14:wrappingTextBoxFlag xmlns="" xmlns:ma14="http://schemas.microsoft.com/office/mac/drawingml/2011/main" val="1"/>
             </a:ext>
           </a:extLst>
         </p:spPr>
@@ -20042,7 +21744,7 @@
           </a:ln>
           <a:extLst>
             <a:ext uri="{C572A759-6A51-4108-AA02-DFA0A04FC94B}">
-              <ma14:wrappingTextBoxFlag xmlns:ma14="http://schemas.microsoft.com/office/mac/drawingml/2011/main" xmlns="" val="1"/>
+              <ma14:wrappingTextBoxFlag xmlns="" xmlns:ma14="http://schemas.microsoft.com/office/mac/drawingml/2011/main" val="1"/>
             </a:ext>
           </a:extLst>
         </p:spPr>
@@ -20207,7 +21909,7 @@
           </a:ln>
           <a:extLst>
             <a:ext uri="{C572A759-6A51-4108-AA02-DFA0A04FC94B}">
-              <ma14:wrappingTextBoxFlag xmlns:ma14="http://schemas.microsoft.com/office/mac/drawingml/2011/main" xmlns="" val="1"/>
+              <ma14:wrappingTextBoxFlag xmlns="" xmlns:ma14="http://schemas.microsoft.com/office/mac/drawingml/2011/main" val="1"/>
             </a:ext>
           </a:extLst>
         </p:spPr>
@@ -20304,7 +22006,7 @@
           </a:prstGeom>
           <a:extLst>
             <a:ext uri="{C572A759-6A51-4108-AA02-DFA0A04FC94B}">
-              <ma14:wrappingTextBoxFlag xmlns:ma14="http://schemas.microsoft.com/office/mac/drawingml/2011/main" xmlns="" val="1"/>
+              <ma14:wrappingTextBoxFlag xmlns="" xmlns:ma14="http://schemas.microsoft.com/office/mac/drawingml/2011/main" val="1"/>
             </a:ext>
           </a:extLst>
         </p:spPr>
